--- a/input/images-source/Images.pptx
+++ b/input/images-source/Images.pptx
@@ -27999,4 +27999,263 @@
     </a:ext>
   </a:extLst>
 </a:theme>
+</file>
+
+<file path=customXml/item1.xml><?xml version="1.0" encoding="utf-8"?>
+<ct:contentTypeSchema xmlns:ct="http://schemas.microsoft.com/office/2006/metadata/contentType" xmlns:ma="http://schemas.microsoft.com/office/2006/metadata/properties/metaAttributes" ct:_="" ma:_="" ma:contentTypeName="Document" ma:contentTypeID="0x010100C3FF88792079FE4CAD7BBDE0BC7B7482" ma:contentTypeVersion="16" ma:contentTypeDescription="Create a new document." ma:contentTypeScope="" ma:versionID="10b42e779589e082fc18e8126cc73c95">
+  <xsd:schema xmlns:xsd="http://www.w3.org/2001/XMLSchema" xmlns:xs="http://www.w3.org/2001/XMLSchema" xmlns:p="http://schemas.microsoft.com/office/2006/metadata/properties" xmlns:ns2="5b833577-d5f3-4c92-a991-e0f5e5f065ff" xmlns:ns3="f82658c3-1dde-4375-8027-c01e071e8904" targetNamespace="http://schemas.microsoft.com/office/2006/metadata/properties" ma:root="true" ma:fieldsID="929128d0b677e760dca1e9118ba1563a" ns2:_="" ns3:_="">
+    <xsd:import namespace="5b833577-d5f3-4c92-a991-e0f5e5f065ff"/>
+    <xsd:import namespace="f82658c3-1dde-4375-8027-c01e071e8904"/>
+    <xsd:element name="properties">
+      <xsd:complexType>
+        <xsd:sequence>
+          <xsd:element name="documentManagement">
+            <xsd:complexType>
+              <xsd:all>
+                <xsd:element ref="ns2:MediaServiceMetadata" minOccurs="0"/>
+                <xsd:element ref="ns2:MediaServiceFastMetadata" minOccurs="0"/>
+                <xsd:element ref="ns2:MediaServiceAutoTags" minOccurs="0"/>
+                <xsd:element ref="ns2:MediaServiceDateTaken" minOccurs="0"/>
+                <xsd:element ref="ns2:MediaServiceLocation" minOccurs="0"/>
+                <xsd:element ref="ns2:MediaServiceGenerationTime" minOccurs="0"/>
+                <xsd:element ref="ns2:MediaServiceEventHashCode" minOccurs="0"/>
+                <xsd:element ref="ns2:MediaServiceOCR" minOccurs="0"/>
+                <xsd:element ref="ns2:MediaServiceAutoKeyPoints" minOccurs="0"/>
+                <xsd:element ref="ns2:MediaServiceKeyPoints" minOccurs="0"/>
+                <xsd:element ref="ns2:MediaLengthInSeconds" minOccurs="0"/>
+                <xsd:element ref="ns2:lcf76f155ced4ddcb4097134ff3c332f" minOccurs="0"/>
+                <xsd:element ref="ns3:TaxCatchAll" minOccurs="0"/>
+                <xsd:element ref="ns2:MediaServiceObjectDetectorVersions" minOccurs="0"/>
+                <xsd:element ref="ns2:MediaServiceSearchProperties" minOccurs="0"/>
+              </xsd:all>
+            </xsd:complexType>
+          </xsd:element>
+        </xsd:sequence>
+      </xsd:complexType>
+    </xsd:element>
+  </xsd:schema>
+  <xsd:schema xmlns:xsd="http://www.w3.org/2001/XMLSchema" xmlns:xs="http://www.w3.org/2001/XMLSchema" xmlns:dms="http://schemas.microsoft.com/office/2006/documentManagement/types" xmlns:pc="http://schemas.microsoft.com/office/infopath/2007/PartnerControls" targetNamespace="5b833577-d5f3-4c92-a991-e0f5e5f065ff" elementFormDefault="qualified">
+    <xsd:import namespace="http://schemas.microsoft.com/office/2006/documentManagement/types"/>
+    <xsd:import namespace="http://schemas.microsoft.com/office/infopath/2007/PartnerControls"/>
+    <xsd:element name="MediaServiceMetadata" ma:index="8" nillable="true" ma:displayName="MediaServiceMetadata" ma:hidden="true" ma:internalName="MediaServiceMetadata" ma:readOnly="true">
+      <xsd:simpleType>
+        <xsd:restriction base="dms:Note"/>
+      </xsd:simpleType>
+    </xsd:element>
+    <xsd:element name="MediaServiceFastMetadata" ma:index="9" nillable="true" ma:displayName="MediaServiceFastMetadata" ma:hidden="true" ma:internalName="MediaServiceFastMetadata" ma:readOnly="true">
+      <xsd:simpleType>
+        <xsd:restriction base="dms:Note"/>
+      </xsd:simpleType>
+    </xsd:element>
+    <xsd:element name="MediaServiceAutoTags" ma:index="10" nillable="true" ma:displayName="Tags" ma:internalName="MediaServiceAutoTags" ma:readOnly="true">
+      <xsd:simpleType>
+        <xsd:restriction base="dms:Text"/>
+      </xsd:simpleType>
+    </xsd:element>
+    <xsd:element name="MediaServiceDateTaken" ma:index="11" nillable="true" ma:displayName="MediaServiceDateTaken" ma:hidden="true" ma:internalName="MediaServiceDateTaken" ma:readOnly="true">
+      <xsd:simpleType>
+        <xsd:restriction base="dms:Text"/>
+      </xsd:simpleType>
+    </xsd:element>
+    <xsd:element name="MediaServiceLocation" ma:index="12" nillable="true" ma:displayName="Location" ma:internalName="MediaServiceLocation" ma:readOnly="true">
+      <xsd:simpleType>
+        <xsd:restriction base="dms:Text"/>
+      </xsd:simpleType>
+    </xsd:element>
+    <xsd:element name="MediaServiceGenerationTime" ma:index="13" nillable="true" ma:displayName="MediaServiceGenerationTime" ma:hidden="true" ma:internalName="MediaServiceGenerationTime" ma:readOnly="true">
+      <xsd:simpleType>
+        <xsd:restriction base="dms:Text"/>
+      </xsd:simpleType>
+    </xsd:element>
+    <xsd:element name="MediaServiceEventHashCode" ma:index="14" nillable="true" ma:displayName="MediaServiceEventHashCode" ma:hidden="true" ma:internalName="MediaServiceEventHashCode" ma:readOnly="true">
+      <xsd:simpleType>
+        <xsd:restriction base="dms:Text"/>
+      </xsd:simpleType>
+    </xsd:element>
+    <xsd:element name="MediaServiceOCR" ma:index="15" nillable="true" ma:displayName="Extracted Text" ma:internalName="MediaServiceOCR" ma:readOnly="true">
+      <xsd:simpleType>
+        <xsd:restriction base="dms:Note">
+          <xsd:maxLength value="255"/>
+        </xsd:restriction>
+      </xsd:simpleType>
+    </xsd:element>
+    <xsd:element name="MediaServiceAutoKeyPoints" ma:index="16" nillable="true" ma:displayName="MediaServiceAutoKeyPoints" ma:hidden="true" ma:internalName="MediaServiceAutoKeyPoints" ma:readOnly="true">
+      <xsd:simpleType>
+        <xsd:restriction base="dms:Note"/>
+      </xsd:simpleType>
+    </xsd:element>
+    <xsd:element name="MediaServiceKeyPoints" ma:index="17" nillable="true" ma:displayName="KeyPoints" ma:internalName="MediaServiceKeyPoints" ma:readOnly="true">
+      <xsd:simpleType>
+        <xsd:restriction base="dms:Note">
+          <xsd:maxLength value="255"/>
+        </xsd:restriction>
+      </xsd:simpleType>
+    </xsd:element>
+    <xsd:element name="MediaLengthInSeconds" ma:index="18" nillable="true" ma:displayName="Length (seconds)" ma:internalName="MediaLengthInSeconds" ma:readOnly="true">
+      <xsd:simpleType>
+        <xsd:restriction base="dms:Unknown"/>
+      </xsd:simpleType>
+    </xsd:element>
+    <xsd:element name="lcf76f155ced4ddcb4097134ff3c332f" ma:index="20" nillable="true" ma:taxonomy="true" ma:internalName="lcf76f155ced4ddcb4097134ff3c332f" ma:taxonomyFieldName="MediaServiceImageTags" ma:displayName="Image Tags" ma:readOnly="false" ma:fieldId="{5cf76f15-5ced-4ddc-b409-7134ff3c332f}" ma:taxonomyMulti="true" ma:sspId="191912c3-2eeb-460f-a7fe-a561d54f8fcf" ma:termSetId="09814cd3-568e-fe90-9814-8d621ff8fb84" ma:anchorId="fba54fb3-c3e1-fe81-a776-ca4b69148c4d" ma:open="true" ma:isKeyword="false">
+      <xsd:complexType>
+        <xsd:sequence>
+          <xsd:element ref="pc:Terms" minOccurs="0" maxOccurs="1"/>
+        </xsd:sequence>
+      </xsd:complexType>
+    </xsd:element>
+    <xsd:element name="MediaServiceObjectDetectorVersions" ma:index="22" nillable="true" ma:displayName="MediaServiceObjectDetectorVersions" ma:description="" ma:hidden="true" ma:indexed="true" ma:internalName="MediaServiceObjectDetectorVersions" ma:readOnly="true">
+      <xsd:simpleType>
+        <xsd:restriction base="dms:Text"/>
+      </xsd:simpleType>
+    </xsd:element>
+    <xsd:element name="MediaServiceSearchProperties" ma:index="23" nillable="true" ma:displayName="MediaServiceSearchProperties" ma:hidden="true" ma:internalName="MediaServiceSearchProperties" ma:readOnly="true">
+      <xsd:simpleType>
+        <xsd:restriction base="dms:Note"/>
+      </xsd:simpleType>
+    </xsd:element>
+  </xsd:schema>
+  <xsd:schema xmlns:xsd="http://www.w3.org/2001/XMLSchema" xmlns:xs="http://www.w3.org/2001/XMLSchema" xmlns:dms="http://schemas.microsoft.com/office/2006/documentManagement/types" xmlns:pc="http://schemas.microsoft.com/office/infopath/2007/PartnerControls" targetNamespace="f82658c3-1dde-4375-8027-c01e071e8904" elementFormDefault="qualified">
+    <xsd:import namespace="http://schemas.microsoft.com/office/2006/documentManagement/types"/>
+    <xsd:import namespace="http://schemas.microsoft.com/office/infopath/2007/PartnerControls"/>
+    <xsd:element name="TaxCatchAll" ma:index="21" nillable="true" ma:displayName="Taxonomy Catch All Column" ma:hidden="true" ma:list="{6ad748f0-b28b-4f4f-b358-e143e647cf5a}" ma:internalName="TaxCatchAll" ma:showField="CatchAllData" ma:web="f82658c3-1dde-4375-8027-c01e071e8904">
+      <xsd:complexType>
+        <xsd:complexContent>
+          <xsd:extension base="dms:MultiChoiceLookup">
+            <xsd:sequence>
+              <xsd:element name="Value" type="dms:Lookup" maxOccurs="unbounded" minOccurs="0" nillable="true"/>
+            </xsd:sequence>
+          </xsd:extension>
+        </xsd:complexContent>
+      </xsd:complexType>
+    </xsd:element>
+  </xsd:schema>
+  <xsd:schema xmlns="http://schemas.openxmlformats.org/package/2006/metadata/core-properties" xmlns:xsd="http://www.w3.org/2001/XMLSchema" xmlns:xsi="http://www.w3.org/2001/XMLSchema-instance" xmlns:dc="http://purl.org/dc/elements/1.1/" xmlns:dcterms="http://purl.org/dc/terms/" xmlns:odoc="http://schemas.microsoft.com/internal/obd" targetNamespace="http://schemas.openxmlformats.org/package/2006/metadata/core-properties" elementFormDefault="qualified" attributeFormDefault="unqualified" blockDefault="#all">
+    <xsd:import namespace="http://purl.org/dc/elements/1.1/" schemaLocation="http://dublincore.org/schemas/xmls/qdc/2003/04/02/dc.xsd"/>
+    <xsd:import namespace="http://purl.org/dc/terms/" schemaLocation="http://dublincore.org/schemas/xmls/qdc/2003/04/02/dcterms.xsd"/>
+    <xsd:element name="coreProperties" type="CT_coreProperties"/>
+    <xsd:complexType name="CT_coreProperties">
+      <xsd:all>
+        <xsd:element ref="dc:creator" minOccurs="0" maxOccurs="1"/>
+        <xsd:element ref="dcterms:created" minOccurs="0" maxOccurs="1"/>
+        <xsd:element ref="dc:identifier" minOccurs="0" maxOccurs="1"/>
+        <xsd:element name="contentType" minOccurs="0" maxOccurs="1" type="xsd:string" ma:index="0" ma:displayName="Content Type"/>
+        <xsd:element ref="dc:title" minOccurs="0" maxOccurs="1" ma:index="4" ma:displayName="Title"/>
+        <xsd:element ref="dc:subject" minOccurs="0" maxOccurs="1"/>
+        <xsd:element ref="dc:description" minOccurs="0" maxOccurs="1"/>
+        <xsd:element name="keywords" minOccurs="0" maxOccurs="1" type="xsd:string"/>
+        <xsd:element ref="dc:language" minOccurs="0" maxOccurs="1"/>
+        <xsd:element name="category" minOccurs="0" maxOccurs="1" type="xsd:string"/>
+        <xsd:element name="version" minOccurs="0" maxOccurs="1" type="xsd:string"/>
+        <xsd:element name="revision" minOccurs="0" maxOccurs="1" type="xsd:string">
+          <xsd:annotation>
+            <xsd:documentation>
+                        This value indicates the number of saves or revisions. The application is responsible for updating this value after each revision.
+                    </xsd:documentation>
+          </xsd:annotation>
+        </xsd:element>
+        <xsd:element name="lastModifiedBy" minOccurs="0" maxOccurs="1" type="xsd:string"/>
+        <xsd:element ref="dcterms:modified" minOccurs="0" maxOccurs="1"/>
+        <xsd:element name="contentStatus" minOccurs="0" maxOccurs="1" type="xsd:string"/>
+      </xsd:all>
+    </xsd:complexType>
+  </xsd:schema>
+  <xs:schema xmlns:pc="http://schemas.microsoft.com/office/infopath/2007/PartnerControls" xmlns:xs="http://www.w3.org/2001/XMLSchema" targetNamespace="http://schemas.microsoft.com/office/infopath/2007/PartnerControls" elementFormDefault="qualified" attributeFormDefault="unqualified">
+    <xs:element name="Person">
+      <xs:complexType>
+        <xs:sequence>
+          <xs:element ref="pc:DisplayName" minOccurs="0"/>
+          <xs:element ref="pc:AccountId" minOccurs="0"/>
+          <xs:element ref="pc:AccountType" minOccurs="0"/>
+        </xs:sequence>
+      </xs:complexType>
+    </xs:element>
+    <xs:element name="DisplayName" type="xs:string"/>
+    <xs:element name="AccountId" type="xs:string"/>
+    <xs:element name="AccountType" type="xs:string"/>
+    <xs:element name="BDCAssociatedEntity">
+      <xs:complexType>
+        <xs:sequence>
+          <xs:element ref="pc:BDCEntity" minOccurs="0" maxOccurs="unbounded"/>
+        </xs:sequence>
+        <xs:attribute ref="pc:EntityNamespace"/>
+        <xs:attribute ref="pc:EntityName"/>
+        <xs:attribute ref="pc:SystemInstanceName"/>
+        <xs:attribute ref="pc:AssociationName"/>
+      </xs:complexType>
+    </xs:element>
+    <xs:attribute name="EntityNamespace" type="xs:string"/>
+    <xs:attribute name="EntityName" type="xs:string"/>
+    <xs:attribute name="SystemInstanceName" type="xs:string"/>
+    <xs:attribute name="AssociationName" type="xs:string"/>
+    <xs:element name="BDCEntity">
+      <xs:complexType>
+        <xs:sequence>
+          <xs:element ref="pc:EntityDisplayName" minOccurs="0"/>
+          <xs:element ref="pc:EntityInstanceReference" minOccurs="0"/>
+          <xs:element ref="pc:EntityId1" minOccurs="0"/>
+          <xs:element ref="pc:EntityId2" minOccurs="0"/>
+          <xs:element ref="pc:EntityId3" minOccurs="0"/>
+          <xs:element ref="pc:EntityId4" minOccurs="0"/>
+          <xs:element ref="pc:EntityId5" minOccurs="0"/>
+        </xs:sequence>
+      </xs:complexType>
+    </xs:element>
+    <xs:element name="EntityDisplayName" type="xs:string"/>
+    <xs:element name="EntityInstanceReference" type="xs:string"/>
+    <xs:element name="EntityId1" type="xs:string"/>
+    <xs:element name="EntityId2" type="xs:string"/>
+    <xs:element name="EntityId3" type="xs:string"/>
+    <xs:element name="EntityId4" type="xs:string"/>
+    <xs:element name="EntityId5" type="xs:string"/>
+    <xs:element name="Terms">
+      <xs:complexType>
+        <xs:sequence>
+          <xs:element ref="pc:TermInfo" minOccurs="0" maxOccurs="unbounded"/>
+        </xs:sequence>
+      </xs:complexType>
+    </xs:element>
+    <xs:element name="TermInfo">
+      <xs:complexType>
+        <xs:sequence>
+          <xs:element ref="pc:TermName" minOccurs="0"/>
+          <xs:element ref="pc:TermId" minOccurs="0"/>
+        </xs:sequence>
+      </xs:complexType>
+    </xs:element>
+    <xs:element name="TermName" type="xs:string"/>
+    <xs:element name="TermId" type="xs:string"/>
+  </xs:schema>
+</ct:contentTypeSchema>
+</file>
+
+<file path=customXml/item2.xml><?xml version="1.0" encoding="utf-8"?>
+<?mso-contentType ?>
+<FormTemplates xmlns="http://schemas.microsoft.com/sharepoint/v3/contenttype/forms">
+  <Display>DocumentLibraryForm</Display>
+  <Edit>DocumentLibraryForm</Edit>
+  <New>DocumentLibraryForm</New>
+</FormTemplates>
+</file>
+
+<file path=customXml/item3.xml><?xml version="1.0" encoding="utf-8"?>
+<p:properties xmlns:p="http://schemas.microsoft.com/office/2006/metadata/properties" xmlns:xsi="http://www.w3.org/2001/XMLSchema-instance" xmlns:pc="http://schemas.microsoft.com/office/infopath/2007/PartnerControls">
+  <documentManagement>
+    <lcf76f155ced4ddcb4097134ff3c332f xmlns="5b833577-d5f3-4c92-a991-e0f5e5f065ff">
+      <Terms xmlns="http://schemas.microsoft.com/office/infopath/2007/PartnerControls"/>
+    </lcf76f155ced4ddcb4097134ff3c332f>
+    <TaxCatchAll xmlns="f82658c3-1dde-4375-8027-c01e071e8904" xsi:nil="true"/>
+  </documentManagement>
+</p:properties>
+</file>
+
+<file path=customXml/itemProps1.xml><?xml version="1.0" encoding="utf-8"?>
+<ds:datastoreItem xmlns:ds="http://schemas.openxmlformats.org/officeDocument/2006/customXml" ds:itemID="{4A9A45B4-740D-4C76-B87E-7179ACD7FD1B}"/>
+</file>
+
+<file path=customXml/itemProps2.xml><?xml version="1.0" encoding="utf-8"?>
+<ds:datastoreItem xmlns:ds="http://schemas.openxmlformats.org/officeDocument/2006/customXml" ds:itemID="{39F12FE4-0B52-4758-B2F9-AF9CD73F46F7}"/>
+</file>
+
+<file path=customXml/itemProps3.xml><?xml version="1.0" encoding="utf-8"?>
+<ds:datastoreItem xmlns:ds="http://schemas.openxmlformats.org/officeDocument/2006/customXml" ds:itemID="{DB0B5C36-FCDB-4D3E-B25C-742EC429D3C3}"/>
 </file>
--- a/input/images-source/Images.pptx
+++ b/input/images-source/Images.pptx
@@ -2,26 +2,28 @@
 <file path=ppt/presentation.xml><?xml version="1.0" encoding="utf-8"?>
 <p:presentation xmlns:a="http://schemas.openxmlformats.org/drawingml/2006/main" xmlns:r="http://schemas.openxmlformats.org/officeDocument/2006/relationships" xmlns:p="http://schemas.openxmlformats.org/presentationml/2006/main" saveSubsetFonts="1">
   <p:sldMasterIdLst>
-    <p:sldMasterId id="2147483648" r:id="rId1"/>
-    <p:sldMasterId id="2147483660" r:id="rId2"/>
+    <p:sldMasterId id="2147483648" r:id="rId4"/>
+    <p:sldMasterId id="2147483660" r:id="rId5"/>
   </p:sldMasterIdLst>
   <p:notesMasterIdLst>
-    <p:notesMasterId r:id="rId16"/>
+    <p:notesMasterId r:id="rId21"/>
   </p:notesMasterIdLst>
   <p:sldIdLst>
-    <p:sldId id="256" r:id="rId3"/>
-    <p:sldId id="257" r:id="rId4"/>
-    <p:sldId id="258" r:id="rId5"/>
-    <p:sldId id="259" r:id="rId6"/>
-    <p:sldId id="2147483640" r:id="rId7"/>
-    <p:sldId id="2147483237" r:id="rId8"/>
-    <p:sldId id="2147483238" r:id="rId9"/>
-    <p:sldId id="2147483239" r:id="rId10"/>
-    <p:sldId id="260" r:id="rId11"/>
-    <p:sldId id="2147483641" r:id="rId12"/>
-    <p:sldId id="261" r:id="rId13"/>
-    <p:sldId id="2147483637" r:id="rId14"/>
-    <p:sldId id="2147483639" r:id="rId15"/>
+    <p:sldId id="256" r:id="rId6"/>
+    <p:sldId id="257" r:id="rId7"/>
+    <p:sldId id="258" r:id="rId8"/>
+    <p:sldId id="259" r:id="rId9"/>
+    <p:sldId id="2147483640" r:id="rId10"/>
+    <p:sldId id="2147483237" r:id="rId11"/>
+    <p:sldId id="2147483238" r:id="rId12"/>
+    <p:sldId id="2147483239" r:id="rId13"/>
+    <p:sldId id="260" r:id="rId14"/>
+    <p:sldId id="2147483641" r:id="rId15"/>
+    <p:sldId id="261" r:id="rId16"/>
+    <p:sldId id="2147483637" r:id="rId17"/>
+    <p:sldId id="2147483639" r:id="rId18"/>
+    <p:sldId id="2147483642" r:id="rId19"/>
+    <p:sldId id="2147483643" r:id="rId20"/>
   </p:sldIdLst>
   <p:sldSz cx="12192000" cy="6858000"/>
   <p:notesSz cx="6858000" cy="9144000"/>
@@ -3410,7 +3412,7 @@
           <a:p>
             <a:fld id="{721C5D9B-510E-445E-AF2D-731917B2632C}" type="datetimeFigureOut">
               <a:rPr lang="en-GB" smtClean="0"/>
-              <a:t>05/02/2026</a:t>
+              <a:t>03/06/2026</a:t>
             </a:fld>
             <a:endParaRPr lang="en-GB"/>
           </a:p>
@@ -4079,7 +4081,7 @@
           <a:p>
             <a:fld id="{8D19A3AA-5CC1-4409-A3F5-5174B3C1B3E1}" type="datetimeFigureOut">
               <a:rPr lang="en-CA" smtClean="0"/>
-              <a:t>2026-02-05</a:t>
+              <a:t>2026-06-03</a:t>
             </a:fld>
             <a:endParaRPr lang="en-CA"/>
           </a:p>
@@ -4279,7 +4281,7 @@
           <a:p>
             <a:fld id="{8D19A3AA-5CC1-4409-A3F5-5174B3C1B3E1}" type="datetimeFigureOut">
               <a:rPr lang="en-CA" smtClean="0"/>
-              <a:t>2026-02-05</a:t>
+              <a:t>2026-06-03</a:t>
             </a:fld>
             <a:endParaRPr lang="en-CA"/>
           </a:p>
@@ -4489,7 +4491,7 @@
           <a:p>
             <a:fld id="{8D19A3AA-5CC1-4409-A3F5-5174B3C1B3E1}" type="datetimeFigureOut">
               <a:rPr lang="en-CA" smtClean="0"/>
-              <a:t>2026-02-05</a:t>
+              <a:t>2026-06-03</a:t>
             </a:fld>
             <a:endParaRPr lang="en-CA"/>
           </a:p>
@@ -9542,7 +9544,7 @@
           <a:p>
             <a:fld id="{8D19A3AA-5CC1-4409-A3F5-5174B3C1B3E1}" type="datetimeFigureOut">
               <a:rPr lang="en-CA" smtClean="0"/>
-              <a:t>2026-02-05</a:t>
+              <a:t>2026-06-03</a:t>
             </a:fld>
             <a:endParaRPr lang="en-CA"/>
           </a:p>
@@ -10703,7 +10705,7 @@
           <a:p>
             <a:fld id="{47B90D53-9087-43D8-A0E6-B303F1F516E5}" type="datetimeFigureOut">
               <a:rPr lang="en-US" smtClean="0"/>
-              <a:t>2/5/2026</a:t>
+              <a:t>6/3/2026</a:t>
             </a:fld>
             <a:endParaRPr lang="en-US"/>
           </a:p>
@@ -13085,7 +13087,7 @@
           <a:p>
             <a:fld id="{8D19A3AA-5CC1-4409-A3F5-5174B3C1B3E1}" type="datetimeFigureOut">
               <a:rPr lang="en-CA" smtClean="0"/>
-              <a:t>2026-02-05</a:t>
+              <a:t>2026-06-03</a:t>
             </a:fld>
             <a:endParaRPr lang="en-CA"/>
           </a:p>
@@ -16445,7 +16447,7 @@
           <a:p>
             <a:fld id="{47B90D53-9087-43D8-A0E6-B303F1F516E5}" type="datetimeFigureOut">
               <a:rPr lang="en-US" smtClean="0"/>
-              <a:t>2/5/2026</a:t>
+              <a:t>6/3/2026</a:t>
             </a:fld>
             <a:endParaRPr lang="en-US"/>
           </a:p>
@@ -16713,7 +16715,7 @@
           <a:p>
             <a:fld id="{8D19A3AA-5CC1-4409-A3F5-5174B3C1B3E1}" type="datetimeFigureOut">
               <a:rPr lang="en-CA" smtClean="0"/>
-              <a:t>2026-02-05</a:t>
+              <a:t>2026-06-03</a:t>
             </a:fld>
             <a:endParaRPr lang="en-CA"/>
           </a:p>
@@ -17128,7 +17130,7 @@
           <a:p>
             <a:fld id="{8D19A3AA-5CC1-4409-A3F5-5174B3C1B3E1}" type="datetimeFigureOut">
               <a:rPr lang="en-CA" smtClean="0"/>
-              <a:t>2026-02-05</a:t>
+              <a:t>2026-06-03</a:t>
             </a:fld>
             <a:endParaRPr lang="en-CA"/>
           </a:p>
@@ -17270,7 +17272,7 @@
           <a:p>
             <a:fld id="{8D19A3AA-5CC1-4409-A3F5-5174B3C1B3E1}" type="datetimeFigureOut">
               <a:rPr lang="en-CA" smtClean="0"/>
-              <a:t>2026-02-05</a:t>
+              <a:t>2026-06-03</a:t>
             </a:fld>
             <a:endParaRPr lang="en-CA"/>
           </a:p>
@@ -17383,7 +17385,7 @@
           <a:p>
             <a:fld id="{8D19A3AA-5CC1-4409-A3F5-5174B3C1B3E1}" type="datetimeFigureOut">
               <a:rPr lang="en-CA" smtClean="0"/>
-              <a:t>2026-02-05</a:t>
+              <a:t>2026-06-03</a:t>
             </a:fld>
             <a:endParaRPr lang="en-CA"/>
           </a:p>
@@ -17696,7 +17698,7 @@
           <a:p>
             <a:fld id="{8D19A3AA-5CC1-4409-A3F5-5174B3C1B3E1}" type="datetimeFigureOut">
               <a:rPr lang="en-CA" smtClean="0"/>
-              <a:t>2026-02-05</a:t>
+              <a:t>2026-06-03</a:t>
             </a:fld>
             <a:endParaRPr lang="en-CA"/>
           </a:p>
@@ -17985,7 +17987,7 @@
           <a:p>
             <a:fld id="{8D19A3AA-5CC1-4409-A3F5-5174B3C1B3E1}" type="datetimeFigureOut">
               <a:rPr lang="en-CA" smtClean="0"/>
-              <a:t>2026-02-05</a:t>
+              <a:t>2026-06-03</a:t>
             </a:fld>
             <a:endParaRPr lang="en-CA"/>
           </a:p>
@@ -18228,7 +18230,7 @@
           <a:p>
             <a:fld id="{8D19A3AA-5CC1-4409-A3F5-5174B3C1B3E1}" type="datetimeFigureOut">
               <a:rPr lang="en-CA" smtClean="0"/>
-              <a:t>2026-02-05</a:t>
+              <a:t>2026-06-03</a:t>
             </a:fld>
             <a:endParaRPr lang="en-CA"/>
           </a:p>
@@ -22525,10 +22527,10 @@
           <p:nvPr/>
         </p:nvPicPr>
         <p:blipFill>
-          <a:blip r:embed="rId4">
+          <a:blip>
             <a:extLst>
               <a:ext uri="{96DAC541-7B7A-43D3-8B79-37D633B846F1}">
-                <asvg:svgBlip xmlns:asvg="http://schemas.microsoft.com/office/drawing/2016/SVG/main" r:embed="rId5"/>
+                <asvg:svgBlip xmlns:asvg="http://schemas.microsoft.com/office/drawing/2016/SVG/main" r:embed="rId4"/>
               </a:ext>
             </a:extLst>
           </a:blip>
@@ -22561,10 +22563,10 @@
           <p:nvPr/>
         </p:nvPicPr>
         <p:blipFill>
-          <a:blip r:embed="rId4">
+          <a:blip>
             <a:extLst>
               <a:ext uri="{96DAC541-7B7A-43D3-8B79-37D633B846F1}">
-                <asvg:svgBlip xmlns:asvg="http://schemas.microsoft.com/office/drawing/2016/SVG/main" r:embed="rId5"/>
+                <asvg:svgBlip xmlns:asvg="http://schemas.microsoft.com/office/drawing/2016/SVG/main" r:embed="rId4"/>
               </a:ext>
             </a:extLst>
           </a:blip>
@@ -22597,10 +22599,10 @@
           <p:nvPr/>
         </p:nvPicPr>
         <p:blipFill>
-          <a:blip r:embed="rId4">
+          <a:blip>
             <a:extLst>
               <a:ext uri="{96DAC541-7B7A-43D3-8B79-37D633B846F1}">
-                <asvg:svgBlip xmlns:asvg="http://schemas.microsoft.com/office/drawing/2016/SVG/main" r:embed="rId5"/>
+                <asvg:svgBlip xmlns:asvg="http://schemas.microsoft.com/office/drawing/2016/SVG/main" r:embed="rId4"/>
               </a:ext>
             </a:extLst>
           </a:blip>
@@ -22633,10 +22635,10 @@
           <p:nvPr/>
         </p:nvPicPr>
         <p:blipFill>
-          <a:blip r:embed="rId4">
+          <a:blip>
             <a:extLst>
               <a:ext uri="{96DAC541-7B7A-43D3-8B79-37D633B846F1}">
-                <asvg:svgBlip xmlns:asvg="http://schemas.microsoft.com/office/drawing/2016/SVG/main" r:embed="rId5"/>
+                <asvg:svgBlip xmlns:asvg="http://schemas.microsoft.com/office/drawing/2016/SVG/main" r:embed="rId4"/>
               </a:ext>
             </a:extLst>
           </a:blip>
@@ -22669,10 +22671,10 @@
           <p:nvPr/>
         </p:nvPicPr>
         <p:blipFill>
-          <a:blip r:embed="rId4">
+          <a:blip>
             <a:extLst>
               <a:ext uri="{96DAC541-7B7A-43D3-8B79-37D633B846F1}">
-                <asvg:svgBlip xmlns:asvg="http://schemas.microsoft.com/office/drawing/2016/SVG/main" r:embed="rId5"/>
+                <asvg:svgBlip xmlns:asvg="http://schemas.microsoft.com/office/drawing/2016/SVG/main" r:embed="rId4"/>
               </a:ext>
             </a:extLst>
           </a:blip>
@@ -23803,6 +23805,1851 @@
 </p:sld>
 </file>
 
+<file path=ppt/slides/slide14.xml><?xml version="1.0" encoding="utf-8"?>
+<p:sld xmlns:a="http://schemas.openxmlformats.org/drawingml/2006/main" xmlns:r="http://schemas.openxmlformats.org/officeDocument/2006/relationships" xmlns:p="http://schemas.openxmlformats.org/presentationml/2006/main">
+  <p:cSld>
+    <p:spTree>
+      <p:nvGrpSpPr>
+        <p:cNvPr id="1" name=""/>
+        <p:cNvGrpSpPr/>
+        <p:nvPr/>
+      </p:nvGrpSpPr>
+      <p:grpSpPr>
+        <a:xfrm>
+          <a:off x="0" y="0"/>
+          <a:ext cx="0" cy="0"/>
+          <a:chOff x="0" y="0"/>
+          <a:chExt cx="0" cy="0"/>
+        </a:xfrm>
+      </p:grpSpPr>
+      <p:sp>
+        <p:nvSpPr>
+          <p:cNvPr id="2" name="Rectangle: Rounded Corners 1">
+            <a:extLst>
+              <a:ext uri="{FF2B5EF4-FFF2-40B4-BE49-F238E27FC236}">
+                <a16:creationId xmlns:a16="http://schemas.microsoft.com/office/drawing/2014/main" id="{39926C27-7192-32E1-7151-B8295706C6BF}"/>
+              </a:ext>
+            </a:extLst>
+          </p:cNvPr>
+          <p:cNvSpPr/>
+          <p:nvPr/>
+        </p:nvSpPr>
+        <p:spPr>
+          <a:xfrm>
+            <a:off x="2194560" y="2447778"/>
+            <a:ext cx="951914" cy="1969477"/>
+          </a:xfrm>
+          <a:prstGeom prst="roundRect">
+            <a:avLst/>
+          </a:prstGeom>
+          <a:solidFill>
+            <a:schemeClr val="bg2">
+              <a:lumMod val="20000"/>
+              <a:lumOff val="80000"/>
+            </a:schemeClr>
+          </a:solidFill>
+          <a:ln>
+            <a:noFill/>
+          </a:ln>
+        </p:spPr>
+        <p:style>
+          <a:lnRef idx="2">
+            <a:schemeClr val="accent1">
+              <a:shade val="50000"/>
+            </a:schemeClr>
+          </a:lnRef>
+          <a:fillRef idx="1">
+            <a:schemeClr val="accent1"/>
+          </a:fillRef>
+          <a:effectRef idx="0">
+            <a:schemeClr val="accent1"/>
+          </a:effectRef>
+          <a:fontRef idx="minor">
+            <a:schemeClr val="lt1"/>
+          </a:fontRef>
+        </p:style>
+        <p:txBody>
+          <a:bodyPr rtlCol="0" anchor="ctr"/>
+          <a:lstStyle/>
+          <a:p>
+            <a:pPr algn="ctr"/>
+            <a:r>
+              <a:rPr lang="en-GB" sz="1400" dirty="0"/>
+              <a:t>Hic textus </a:t>
+            </a:r>
+            <a:r>
+              <a:rPr lang="en-GB" sz="1400" dirty="0" err="1"/>
+              <a:t>tantummodo</a:t>
+            </a:r>
+            <a:endParaRPr lang="en-GB" sz="1400" dirty="0"/>
+          </a:p>
+        </p:txBody>
+      </p:sp>
+      <p:sp>
+        <p:nvSpPr>
+          <p:cNvPr id="3" name="Rectangle: Rounded Corners 2">
+            <a:extLst>
+              <a:ext uri="{FF2B5EF4-FFF2-40B4-BE49-F238E27FC236}">
+                <a16:creationId xmlns:a16="http://schemas.microsoft.com/office/drawing/2014/main" id="{FF6A01E0-04A4-EB9E-4A89-F23C5A6F0B82}"/>
+              </a:ext>
+            </a:extLst>
+          </p:cNvPr>
+          <p:cNvSpPr/>
+          <p:nvPr/>
+        </p:nvSpPr>
+        <p:spPr>
+          <a:xfrm>
+            <a:off x="3577883" y="2527495"/>
+            <a:ext cx="2250831" cy="590843"/>
+          </a:xfrm>
+          <a:prstGeom prst="roundRect">
+            <a:avLst/>
+          </a:prstGeom>
+          <a:solidFill>
+            <a:schemeClr val="bg2">
+              <a:lumMod val="20000"/>
+              <a:lumOff val="80000"/>
+            </a:schemeClr>
+          </a:solidFill>
+          <a:ln>
+            <a:noFill/>
+          </a:ln>
+        </p:spPr>
+        <p:style>
+          <a:lnRef idx="2">
+            <a:schemeClr val="accent1">
+              <a:shade val="50000"/>
+            </a:schemeClr>
+          </a:lnRef>
+          <a:fillRef idx="1">
+            <a:schemeClr val="accent1"/>
+          </a:fillRef>
+          <a:effectRef idx="0">
+            <a:schemeClr val="accent1"/>
+          </a:effectRef>
+          <a:fontRef idx="minor">
+            <a:schemeClr val="lt1"/>
+          </a:fontRef>
+        </p:style>
+        <p:txBody>
+          <a:bodyPr rtlCol="0" anchor="ctr"/>
+          <a:lstStyle/>
+          <a:p>
+            <a:pPr algn="ctr"/>
+            <a:r>
+              <a:rPr lang="en-GB" sz="1400" dirty="0"/>
+              <a:t>Hic textus </a:t>
+            </a:r>
+            <a:r>
+              <a:rPr lang="en-GB" sz="1400" dirty="0" err="1"/>
+              <a:t>tantummodo</a:t>
+            </a:r>
+            <a:endParaRPr lang="en-GB" sz="1400" dirty="0"/>
+          </a:p>
+        </p:txBody>
+      </p:sp>
+      <p:sp>
+        <p:nvSpPr>
+          <p:cNvPr id="4" name="Rectangle: Rounded Corners 3">
+            <a:extLst>
+              <a:ext uri="{FF2B5EF4-FFF2-40B4-BE49-F238E27FC236}">
+                <a16:creationId xmlns:a16="http://schemas.microsoft.com/office/drawing/2014/main" id="{C3816092-ED9D-B500-073E-03B4FFB42B73}"/>
+              </a:ext>
+            </a:extLst>
+          </p:cNvPr>
+          <p:cNvSpPr/>
+          <p:nvPr/>
+        </p:nvSpPr>
+        <p:spPr>
+          <a:xfrm>
+            <a:off x="3530990" y="3739663"/>
+            <a:ext cx="2250831" cy="590843"/>
+          </a:xfrm>
+          <a:prstGeom prst="roundRect">
+            <a:avLst/>
+          </a:prstGeom>
+          <a:solidFill>
+            <a:schemeClr val="bg2">
+              <a:lumMod val="20000"/>
+              <a:lumOff val="80000"/>
+            </a:schemeClr>
+          </a:solidFill>
+          <a:ln>
+            <a:noFill/>
+          </a:ln>
+        </p:spPr>
+        <p:style>
+          <a:lnRef idx="2">
+            <a:schemeClr val="accent1">
+              <a:shade val="50000"/>
+            </a:schemeClr>
+          </a:lnRef>
+          <a:fillRef idx="1">
+            <a:schemeClr val="accent1"/>
+          </a:fillRef>
+          <a:effectRef idx="0">
+            <a:schemeClr val="accent1"/>
+          </a:effectRef>
+          <a:fontRef idx="minor">
+            <a:schemeClr val="lt1"/>
+          </a:fontRef>
+        </p:style>
+        <p:txBody>
+          <a:bodyPr rtlCol="0" anchor="ctr"/>
+          <a:lstStyle/>
+          <a:p>
+            <a:pPr algn="ctr"/>
+            <a:r>
+              <a:rPr lang="en-GB" sz="1400" dirty="0"/>
+              <a:t>Hic textus </a:t>
+            </a:r>
+            <a:r>
+              <a:rPr lang="en-GB" sz="1400" dirty="0" err="1"/>
+              <a:t>tantummodo</a:t>
+            </a:r>
+            <a:endParaRPr lang="en-GB" sz="1400" dirty="0"/>
+          </a:p>
+        </p:txBody>
+      </p:sp>
+      <p:sp>
+        <p:nvSpPr>
+          <p:cNvPr id="5" name="Rectangle: Rounded Corners 4">
+            <a:extLst>
+              <a:ext uri="{FF2B5EF4-FFF2-40B4-BE49-F238E27FC236}">
+                <a16:creationId xmlns:a16="http://schemas.microsoft.com/office/drawing/2014/main" id="{B76958E9-C95C-9D4A-FF2C-40D2B3F336F1}"/>
+              </a:ext>
+            </a:extLst>
+          </p:cNvPr>
+          <p:cNvSpPr/>
+          <p:nvPr/>
+        </p:nvSpPr>
+        <p:spPr>
+          <a:xfrm>
+            <a:off x="6253089" y="2460674"/>
+            <a:ext cx="951914" cy="1969477"/>
+          </a:xfrm>
+          <a:prstGeom prst="roundRect">
+            <a:avLst/>
+          </a:prstGeom>
+          <a:solidFill>
+            <a:schemeClr val="bg2">
+              <a:lumMod val="20000"/>
+              <a:lumOff val="80000"/>
+            </a:schemeClr>
+          </a:solidFill>
+          <a:ln>
+            <a:noFill/>
+          </a:ln>
+        </p:spPr>
+        <p:style>
+          <a:lnRef idx="2">
+            <a:schemeClr val="accent1">
+              <a:shade val="50000"/>
+            </a:schemeClr>
+          </a:lnRef>
+          <a:fillRef idx="1">
+            <a:schemeClr val="accent1"/>
+          </a:fillRef>
+          <a:effectRef idx="0">
+            <a:schemeClr val="accent1"/>
+          </a:effectRef>
+          <a:fontRef idx="minor">
+            <a:schemeClr val="lt1"/>
+          </a:fontRef>
+        </p:style>
+        <p:txBody>
+          <a:bodyPr rtlCol="0" anchor="ctr"/>
+          <a:lstStyle/>
+          <a:p>
+            <a:pPr algn="ctr"/>
+            <a:r>
+              <a:rPr lang="en-GB" sz="1400" dirty="0"/>
+              <a:t>Hic textus </a:t>
+            </a:r>
+            <a:r>
+              <a:rPr lang="en-GB" sz="1400" dirty="0" err="1"/>
+              <a:t>tantummodo</a:t>
+            </a:r>
+            <a:endParaRPr lang="en-GB" sz="1400" dirty="0"/>
+          </a:p>
+        </p:txBody>
+      </p:sp>
+      <p:sp>
+        <p:nvSpPr>
+          <p:cNvPr id="6" name="Rectangle: Rounded Corners 5">
+            <a:extLst>
+              <a:ext uri="{FF2B5EF4-FFF2-40B4-BE49-F238E27FC236}">
+                <a16:creationId xmlns:a16="http://schemas.microsoft.com/office/drawing/2014/main" id="{29F87518-EE29-2198-446C-346342B0B5C6}"/>
+              </a:ext>
+            </a:extLst>
+          </p:cNvPr>
+          <p:cNvSpPr/>
+          <p:nvPr/>
+        </p:nvSpPr>
+        <p:spPr>
+          <a:xfrm>
+            <a:off x="2670517" y="4529797"/>
+            <a:ext cx="4058529" cy="342314"/>
+          </a:xfrm>
+          <a:prstGeom prst="roundRect">
+            <a:avLst/>
+          </a:prstGeom>
+          <a:solidFill>
+            <a:schemeClr val="bg1">
+              <a:lumMod val="75000"/>
+            </a:schemeClr>
+          </a:solidFill>
+          <a:ln>
+            <a:noFill/>
+          </a:ln>
+        </p:spPr>
+        <p:style>
+          <a:lnRef idx="2">
+            <a:schemeClr val="accent1">
+              <a:shade val="50000"/>
+            </a:schemeClr>
+          </a:lnRef>
+          <a:fillRef idx="1">
+            <a:schemeClr val="accent1"/>
+          </a:fillRef>
+          <a:effectRef idx="0">
+            <a:schemeClr val="accent1"/>
+          </a:effectRef>
+          <a:fontRef idx="minor">
+            <a:schemeClr val="lt1"/>
+          </a:fontRef>
+        </p:style>
+        <p:txBody>
+          <a:bodyPr rtlCol="0" anchor="ctr"/>
+          <a:lstStyle/>
+          <a:p>
+            <a:pPr algn="ctr"/>
+            <a:r>
+              <a:rPr lang="en-GB" sz="1400" dirty="0"/>
+              <a:t>Hic textus </a:t>
+            </a:r>
+            <a:r>
+              <a:rPr lang="en-GB" sz="1400" dirty="0" err="1"/>
+              <a:t>tantummodo</a:t>
+            </a:r>
+            <a:endParaRPr lang="en-GB" sz="1400" dirty="0"/>
+          </a:p>
+        </p:txBody>
+      </p:sp>
+      <p:sp>
+        <p:nvSpPr>
+          <p:cNvPr id="7" name="TextBox 6">
+            <a:extLst>
+              <a:ext uri="{FF2B5EF4-FFF2-40B4-BE49-F238E27FC236}">
+                <a16:creationId xmlns:a16="http://schemas.microsoft.com/office/drawing/2014/main" id="{359FAEDC-61B9-1F0E-F16C-DC63E883D5D9}"/>
+              </a:ext>
+            </a:extLst>
+          </p:cNvPr>
+          <p:cNvSpPr txBox="1"/>
+          <p:nvPr/>
+        </p:nvSpPr>
+        <p:spPr>
+          <a:xfrm>
+            <a:off x="2194561" y="2039815"/>
+            <a:ext cx="4970584" cy="342314"/>
+          </a:xfrm>
+          <a:prstGeom prst="rect">
+            <a:avLst/>
+          </a:prstGeom>
+          <a:noFill/>
+        </p:spPr>
+        <p:txBody>
+          <a:bodyPr wrap="none" rtlCol="0">
+            <a:noAutofit/>
+          </a:bodyPr>
+          <a:lstStyle/>
+          <a:p>
+            <a:pPr algn="ctr"/>
+            <a:r>
+              <a:rPr lang="en-GB" b="1" dirty="0"/>
+              <a:t>Exemplar Trial Schema Drawing</a:t>
+            </a:r>
+          </a:p>
+        </p:txBody>
+      </p:sp>
+      <p:sp>
+        <p:nvSpPr>
+          <p:cNvPr id="8" name="Arrow: Right 7">
+            <a:extLst>
+              <a:ext uri="{FF2B5EF4-FFF2-40B4-BE49-F238E27FC236}">
+                <a16:creationId xmlns:a16="http://schemas.microsoft.com/office/drawing/2014/main" id="{200EDC8F-2C2E-59CE-C440-E331C172CADE}"/>
+              </a:ext>
+            </a:extLst>
+          </p:cNvPr>
+          <p:cNvSpPr/>
+          <p:nvPr/>
+        </p:nvSpPr>
+        <p:spPr>
+          <a:xfrm>
+            <a:off x="3226191" y="2724443"/>
+            <a:ext cx="304799" cy="239151"/>
+          </a:xfrm>
+          <a:prstGeom prst="rightArrow">
+            <a:avLst/>
+          </a:prstGeom>
+          <a:solidFill>
+            <a:schemeClr val="bg1">
+              <a:lumMod val="75000"/>
+            </a:schemeClr>
+          </a:solidFill>
+          <a:ln>
+            <a:noFill/>
+          </a:ln>
+        </p:spPr>
+        <p:style>
+          <a:lnRef idx="2">
+            <a:schemeClr val="accent1">
+              <a:shade val="50000"/>
+            </a:schemeClr>
+          </a:lnRef>
+          <a:fillRef idx="1">
+            <a:schemeClr val="accent1"/>
+          </a:fillRef>
+          <a:effectRef idx="0">
+            <a:schemeClr val="accent1"/>
+          </a:effectRef>
+          <a:fontRef idx="minor">
+            <a:schemeClr val="lt1"/>
+          </a:fontRef>
+        </p:style>
+        <p:txBody>
+          <a:bodyPr rtlCol="0" anchor="ctr"/>
+          <a:lstStyle/>
+          <a:p>
+            <a:pPr algn="ctr"/>
+            <a:endParaRPr lang="en-GB" sz="1400"/>
+          </a:p>
+        </p:txBody>
+      </p:sp>
+      <p:sp>
+        <p:nvSpPr>
+          <p:cNvPr id="9" name="Arrow: Right 8">
+            <a:extLst>
+              <a:ext uri="{FF2B5EF4-FFF2-40B4-BE49-F238E27FC236}">
+                <a16:creationId xmlns:a16="http://schemas.microsoft.com/office/drawing/2014/main" id="{C3605F98-BBDB-0262-5DE7-656BAA1605DD}"/>
+              </a:ext>
+            </a:extLst>
+          </p:cNvPr>
+          <p:cNvSpPr/>
+          <p:nvPr/>
+        </p:nvSpPr>
+        <p:spPr>
+          <a:xfrm>
+            <a:off x="3166403" y="3894407"/>
+            <a:ext cx="304799" cy="239151"/>
+          </a:xfrm>
+          <a:prstGeom prst="rightArrow">
+            <a:avLst/>
+          </a:prstGeom>
+          <a:solidFill>
+            <a:schemeClr val="bg1">
+              <a:lumMod val="75000"/>
+            </a:schemeClr>
+          </a:solidFill>
+          <a:ln>
+            <a:noFill/>
+          </a:ln>
+        </p:spPr>
+        <p:style>
+          <a:lnRef idx="2">
+            <a:schemeClr val="accent1">
+              <a:shade val="50000"/>
+            </a:schemeClr>
+          </a:lnRef>
+          <a:fillRef idx="1">
+            <a:schemeClr val="accent1"/>
+          </a:fillRef>
+          <a:effectRef idx="0">
+            <a:schemeClr val="accent1"/>
+          </a:effectRef>
+          <a:fontRef idx="minor">
+            <a:schemeClr val="lt1"/>
+          </a:fontRef>
+        </p:style>
+        <p:txBody>
+          <a:bodyPr rtlCol="0" anchor="ctr"/>
+          <a:lstStyle/>
+          <a:p>
+            <a:pPr algn="ctr"/>
+            <a:endParaRPr lang="en-GB" sz="1400"/>
+          </a:p>
+        </p:txBody>
+      </p:sp>
+      <p:sp>
+        <p:nvSpPr>
+          <p:cNvPr id="11" name="Arrow: Right 10">
+            <a:extLst>
+              <a:ext uri="{FF2B5EF4-FFF2-40B4-BE49-F238E27FC236}">
+                <a16:creationId xmlns:a16="http://schemas.microsoft.com/office/drawing/2014/main" id="{5AED23C3-C20C-2CC1-08DD-082CB95E32A6}"/>
+              </a:ext>
+            </a:extLst>
+          </p:cNvPr>
+          <p:cNvSpPr/>
+          <p:nvPr/>
+        </p:nvSpPr>
+        <p:spPr>
+          <a:xfrm>
+            <a:off x="5888502" y="2720926"/>
+            <a:ext cx="304799" cy="239151"/>
+          </a:xfrm>
+          <a:prstGeom prst="rightArrow">
+            <a:avLst/>
+          </a:prstGeom>
+          <a:solidFill>
+            <a:schemeClr val="bg1">
+              <a:lumMod val="75000"/>
+            </a:schemeClr>
+          </a:solidFill>
+          <a:ln>
+            <a:noFill/>
+          </a:ln>
+        </p:spPr>
+        <p:style>
+          <a:lnRef idx="2">
+            <a:schemeClr val="accent1">
+              <a:shade val="50000"/>
+            </a:schemeClr>
+          </a:lnRef>
+          <a:fillRef idx="1">
+            <a:schemeClr val="accent1"/>
+          </a:fillRef>
+          <a:effectRef idx="0">
+            <a:schemeClr val="accent1"/>
+          </a:effectRef>
+          <a:fontRef idx="minor">
+            <a:schemeClr val="lt1"/>
+          </a:fontRef>
+        </p:style>
+        <p:txBody>
+          <a:bodyPr rtlCol="0" anchor="ctr"/>
+          <a:lstStyle/>
+          <a:p>
+            <a:pPr algn="ctr"/>
+            <a:endParaRPr lang="en-GB" sz="1400"/>
+          </a:p>
+        </p:txBody>
+      </p:sp>
+      <p:sp>
+        <p:nvSpPr>
+          <p:cNvPr id="12" name="Arrow: Right 11">
+            <a:extLst>
+              <a:ext uri="{FF2B5EF4-FFF2-40B4-BE49-F238E27FC236}">
+                <a16:creationId xmlns:a16="http://schemas.microsoft.com/office/drawing/2014/main" id="{56853881-5F52-18BB-F1A0-844D3E9F5FFE}"/>
+              </a:ext>
+            </a:extLst>
+          </p:cNvPr>
+          <p:cNvSpPr/>
+          <p:nvPr/>
+        </p:nvSpPr>
+        <p:spPr>
+          <a:xfrm>
+            <a:off x="5870916" y="3894406"/>
+            <a:ext cx="304799" cy="239151"/>
+          </a:xfrm>
+          <a:prstGeom prst="rightArrow">
+            <a:avLst/>
+          </a:prstGeom>
+          <a:solidFill>
+            <a:schemeClr val="bg1">
+              <a:lumMod val="75000"/>
+            </a:schemeClr>
+          </a:solidFill>
+          <a:ln>
+            <a:noFill/>
+          </a:ln>
+        </p:spPr>
+        <p:style>
+          <a:lnRef idx="2">
+            <a:schemeClr val="accent1">
+              <a:shade val="50000"/>
+            </a:schemeClr>
+          </a:lnRef>
+          <a:fillRef idx="1">
+            <a:schemeClr val="accent1"/>
+          </a:fillRef>
+          <a:effectRef idx="0">
+            <a:schemeClr val="accent1"/>
+          </a:effectRef>
+          <a:fontRef idx="minor">
+            <a:schemeClr val="lt1"/>
+          </a:fontRef>
+        </p:style>
+        <p:txBody>
+          <a:bodyPr rtlCol="0" anchor="ctr"/>
+          <a:lstStyle/>
+          <a:p>
+            <a:pPr algn="ctr"/>
+            <a:endParaRPr lang="en-GB" sz="1400"/>
+          </a:p>
+        </p:txBody>
+      </p:sp>
+    </p:spTree>
+    <p:extLst>
+      <p:ext uri="{BB962C8B-B14F-4D97-AF65-F5344CB8AC3E}">
+        <p14:creationId xmlns:p14="http://schemas.microsoft.com/office/powerpoint/2010/main" val="2329457721"/>
+      </p:ext>
+    </p:extLst>
+  </p:cSld>
+  <p:clrMapOvr>
+    <a:masterClrMapping/>
+  </p:clrMapOvr>
+  <p:transition>
+    <p:fade/>
+  </p:transition>
+</p:sld>
+</file>
+
+<file path=ppt/slides/slide15.xml><?xml version="1.0" encoding="utf-8"?>
+<p:sld xmlns:a="http://schemas.openxmlformats.org/drawingml/2006/main" xmlns:r="http://schemas.openxmlformats.org/officeDocument/2006/relationships" xmlns:p="http://schemas.openxmlformats.org/presentationml/2006/main">
+  <p:cSld>
+    <p:spTree>
+      <p:nvGrpSpPr>
+        <p:cNvPr id="1" name=""/>
+        <p:cNvGrpSpPr/>
+        <p:nvPr/>
+      </p:nvGrpSpPr>
+      <p:grpSpPr>
+        <a:xfrm>
+          <a:off x="0" y="0"/>
+          <a:ext cx="0" cy="0"/>
+          <a:chOff x="0" y="0"/>
+          <a:chExt cx="0" cy="0"/>
+        </a:xfrm>
+      </p:grpSpPr>
+      <p:graphicFrame>
+        <p:nvGraphicFramePr>
+          <p:cNvPr id="2" name="Table 1">
+            <a:extLst>
+              <a:ext uri="{FF2B5EF4-FFF2-40B4-BE49-F238E27FC236}">
+                <a16:creationId xmlns:a16="http://schemas.microsoft.com/office/drawing/2014/main" id="{E2895BCE-BFFE-282C-BD8B-6422388186DD}"/>
+              </a:ext>
+            </a:extLst>
+          </p:cNvPr>
+          <p:cNvGraphicFramePr>
+            <a:graphicFrameLocks noGrp="1"/>
+          </p:cNvGraphicFramePr>
+          <p:nvPr>
+            <p:extLst>
+              <p:ext uri="{D42A27DB-BD31-4B8C-83A1-F6EECF244321}">
+                <p14:modId xmlns:p14="http://schemas.microsoft.com/office/powerpoint/2010/main" val="2007438003"/>
+              </p:ext>
+            </p:extLst>
+          </p:nvPr>
+        </p:nvGraphicFramePr>
+        <p:xfrm>
+          <a:off x="2698653" y="2420791"/>
+          <a:ext cx="3962400" cy="1425893"/>
+        </p:xfrm>
+        <a:graphic>
+          <a:graphicData uri="http://schemas.openxmlformats.org/drawingml/2006/table">
+            <a:tbl>
+              <a:tblPr>
+                <a:tableStyleId>{5C22544A-7EE6-4342-B048-85BDC9FD1C3A}</a:tableStyleId>
+              </a:tblPr>
+              <a:tblGrid>
+                <a:gridCol w="1219200">
+                  <a:extLst>
+                    <a:ext uri="{9D8B030D-6E8A-4147-A177-3AD203B41FA5}">
+                      <a16:colId xmlns:a16="http://schemas.microsoft.com/office/drawing/2014/main" val="2922249090"/>
+                    </a:ext>
+                  </a:extLst>
+                </a:gridCol>
+                <a:gridCol w="152400">
+                  <a:extLst>
+                    <a:ext uri="{9D8B030D-6E8A-4147-A177-3AD203B41FA5}">
+                      <a16:colId xmlns:a16="http://schemas.microsoft.com/office/drawing/2014/main" val="2065860710"/>
+                    </a:ext>
+                  </a:extLst>
+                </a:gridCol>
+                <a:gridCol w="647700">
+                  <a:extLst>
+                    <a:ext uri="{9D8B030D-6E8A-4147-A177-3AD203B41FA5}">
+                      <a16:colId xmlns:a16="http://schemas.microsoft.com/office/drawing/2014/main" val="1196578801"/>
+                    </a:ext>
+                  </a:extLst>
+                </a:gridCol>
+                <a:gridCol w="647700">
+                  <a:extLst>
+                    <a:ext uri="{9D8B030D-6E8A-4147-A177-3AD203B41FA5}">
+                      <a16:colId xmlns:a16="http://schemas.microsoft.com/office/drawing/2014/main" val="1301300825"/>
+                    </a:ext>
+                  </a:extLst>
+                </a:gridCol>
+                <a:gridCol w="647700">
+                  <a:extLst>
+                    <a:ext uri="{9D8B030D-6E8A-4147-A177-3AD203B41FA5}">
+                      <a16:colId xmlns:a16="http://schemas.microsoft.com/office/drawing/2014/main" val="1094402213"/>
+                    </a:ext>
+                  </a:extLst>
+                </a:gridCol>
+                <a:gridCol w="647700">
+                  <a:extLst>
+                    <a:ext uri="{9D8B030D-6E8A-4147-A177-3AD203B41FA5}">
+                      <a16:colId xmlns:a16="http://schemas.microsoft.com/office/drawing/2014/main" val="2595414494"/>
+                    </a:ext>
+                  </a:extLst>
+                </a:gridCol>
+              </a:tblGrid>
+              <a:tr h="180975">
+                <a:tc>
+                  <a:txBody>
+                    <a:bodyPr/>
+                    <a:lstStyle/>
+                    <a:p>
+                      <a:pPr algn="r" fontAlgn="b">
+                        <a:buNone/>
+                      </a:pPr>
+                      <a:r>
+                        <a:rPr lang="en-GB" sz="1100" u="none" strike="noStrike">
+                          <a:effectLst/>
+                        </a:rPr>
+                        <a:t> </a:t>
+                      </a:r>
+                      <a:endParaRPr lang="en-GB" sz="1100" b="0" i="0" u="none" strike="noStrike">
+                        <a:solidFill>
+                          <a:srgbClr val="000000"/>
+                        </a:solidFill>
+                        <a:effectLst/>
+                        <a:latin typeface="Aptos Narrow" panose="020B0004020202020204" pitchFamily="34" charset="0"/>
+                      </a:endParaRPr>
+                    </a:p>
+                  </a:txBody>
+                  <a:tcPr marL="4763" marR="4763" marT="4763" marB="0" anchor="b"/>
+                </a:tc>
+                <a:tc>
+                  <a:txBody>
+                    <a:bodyPr/>
+                    <a:lstStyle/>
+                    <a:p>
+                      <a:pPr algn="l" fontAlgn="b">
+                        <a:buNone/>
+                      </a:pPr>
+                      <a:r>
+                        <a:rPr lang="en-GB" sz="1100" u="none" strike="noStrike">
+                          <a:effectLst/>
+                        </a:rPr>
+                        <a:t> </a:t>
+                      </a:r>
+                      <a:endParaRPr lang="en-GB" sz="1100" b="0" i="0" u="none" strike="noStrike">
+                        <a:solidFill>
+                          <a:srgbClr val="000000"/>
+                        </a:solidFill>
+                        <a:effectLst/>
+                        <a:latin typeface="Aptos Narrow" panose="020B0004020202020204" pitchFamily="34" charset="0"/>
+                      </a:endParaRPr>
+                    </a:p>
+                  </a:txBody>
+                  <a:tcPr marL="4763" marR="4763" marT="4763" marB="0" anchor="b"/>
+                </a:tc>
+                <a:tc>
+                  <a:txBody>
+                    <a:bodyPr/>
+                    <a:lstStyle/>
+                    <a:p>
+                      <a:pPr algn="l" fontAlgn="b">
+                        <a:buNone/>
+                      </a:pPr>
+                      <a:r>
+                        <a:rPr lang="en-GB" sz="1100" u="none" strike="noStrike">
+                          <a:effectLst/>
+                        </a:rPr>
+                        <a:t>Day -1</a:t>
+                      </a:r>
+                      <a:endParaRPr lang="en-GB" sz="1100" b="0" i="0" u="none" strike="noStrike">
+                        <a:solidFill>
+                          <a:srgbClr val="000000"/>
+                        </a:solidFill>
+                        <a:effectLst/>
+                        <a:latin typeface="Aptos Narrow" panose="020B0004020202020204" pitchFamily="34" charset="0"/>
+                      </a:endParaRPr>
+                    </a:p>
+                  </a:txBody>
+                  <a:tcPr marL="4763" marR="4763" marT="4763" marB="0" anchor="b"/>
+                </a:tc>
+                <a:tc>
+                  <a:txBody>
+                    <a:bodyPr/>
+                    <a:lstStyle/>
+                    <a:p>
+                      <a:pPr algn="l" fontAlgn="b">
+                        <a:buNone/>
+                      </a:pPr>
+                      <a:r>
+                        <a:rPr lang="en-GB" sz="1100" u="none" strike="noStrike">
+                          <a:effectLst/>
+                        </a:rPr>
+                        <a:t>Day 0</a:t>
+                      </a:r>
+                      <a:endParaRPr lang="en-GB" sz="1100" b="0" i="0" u="none" strike="noStrike">
+                        <a:solidFill>
+                          <a:srgbClr val="000000"/>
+                        </a:solidFill>
+                        <a:effectLst/>
+                        <a:latin typeface="Aptos Narrow" panose="020B0004020202020204" pitchFamily="34" charset="0"/>
+                      </a:endParaRPr>
+                    </a:p>
+                  </a:txBody>
+                  <a:tcPr marL="4763" marR="4763" marT="4763" marB="0" anchor="b"/>
+                </a:tc>
+                <a:tc>
+                  <a:txBody>
+                    <a:bodyPr/>
+                    <a:lstStyle/>
+                    <a:p>
+                      <a:pPr algn="l" fontAlgn="b">
+                        <a:buNone/>
+                      </a:pPr>
+                      <a:r>
+                        <a:rPr lang="en-GB" sz="1100" u="none" strike="noStrike">
+                          <a:effectLst/>
+                        </a:rPr>
+                        <a:t>Day 1 to n</a:t>
+                      </a:r>
+                      <a:endParaRPr lang="en-GB" sz="1100" b="0" i="0" u="none" strike="noStrike">
+                        <a:solidFill>
+                          <a:srgbClr val="000000"/>
+                        </a:solidFill>
+                        <a:effectLst/>
+                        <a:latin typeface="Aptos Narrow" panose="020B0004020202020204" pitchFamily="34" charset="0"/>
+                      </a:endParaRPr>
+                    </a:p>
+                  </a:txBody>
+                  <a:tcPr marL="4763" marR="4763" marT="4763" marB="0" anchor="b"/>
+                </a:tc>
+                <a:tc>
+                  <a:txBody>
+                    <a:bodyPr/>
+                    <a:lstStyle/>
+                    <a:p>
+                      <a:pPr algn="l" fontAlgn="b">
+                        <a:buNone/>
+                      </a:pPr>
+                      <a:r>
+                        <a:rPr lang="en-GB" sz="1100" u="none" strike="noStrike">
+                          <a:effectLst/>
+                        </a:rPr>
+                        <a:t>Day n+1</a:t>
+                      </a:r>
+                      <a:endParaRPr lang="en-GB" sz="1100" b="0" i="0" u="none" strike="noStrike">
+                        <a:solidFill>
+                          <a:srgbClr val="000000"/>
+                        </a:solidFill>
+                        <a:effectLst/>
+                        <a:latin typeface="Aptos Narrow" panose="020B0004020202020204" pitchFamily="34" charset="0"/>
+                      </a:endParaRPr>
+                    </a:p>
+                  </a:txBody>
+                  <a:tcPr marL="4763" marR="4763" marT="4763" marB="0" anchor="b"/>
+                </a:tc>
+                <a:extLst>
+                  <a:ext uri="{0D108BD9-81ED-4DB2-BD59-A6C34878D82A}">
+                    <a16:rowId xmlns:a16="http://schemas.microsoft.com/office/drawing/2014/main" val="3012649683"/>
+                  </a:ext>
+                </a:extLst>
+              </a:tr>
+              <a:tr h="180975">
+                <a:tc>
+                  <a:txBody>
+                    <a:bodyPr/>
+                    <a:lstStyle/>
+                    <a:p>
+                      <a:pPr algn="r" fontAlgn="b">
+                        <a:buNone/>
+                      </a:pPr>
+                      <a:r>
+                        <a:rPr lang="en-GB" sz="1100" u="none" strike="noStrike">
+                          <a:effectLst/>
+                        </a:rPr>
+                        <a:t>Pre-assessment</a:t>
+                      </a:r>
+                      <a:endParaRPr lang="en-GB" sz="1100" b="0" i="0" u="none" strike="noStrike">
+                        <a:solidFill>
+                          <a:srgbClr val="000000"/>
+                        </a:solidFill>
+                        <a:effectLst/>
+                        <a:latin typeface="Aptos Narrow" panose="020B0004020202020204" pitchFamily="34" charset="0"/>
+                      </a:endParaRPr>
+                    </a:p>
+                  </a:txBody>
+                  <a:tcPr marL="4763" marR="4763" marT="4763" marB="0" anchor="b"/>
+                </a:tc>
+                <a:tc>
+                  <a:txBody>
+                    <a:bodyPr/>
+                    <a:lstStyle/>
+                    <a:p>
+                      <a:pPr algn="l" fontAlgn="b">
+                        <a:buNone/>
+                      </a:pPr>
+                      <a:r>
+                        <a:rPr lang="en-GB" sz="1100" u="none" strike="noStrike">
+                          <a:effectLst/>
+                        </a:rPr>
+                        <a:t> </a:t>
+                      </a:r>
+                      <a:endParaRPr lang="en-GB" sz="1100" b="0" i="0" u="none" strike="noStrike">
+                        <a:solidFill>
+                          <a:srgbClr val="000000"/>
+                        </a:solidFill>
+                        <a:effectLst/>
+                        <a:latin typeface="Aptos Narrow" panose="020B0004020202020204" pitchFamily="34" charset="0"/>
+                      </a:endParaRPr>
+                    </a:p>
+                  </a:txBody>
+                  <a:tcPr marL="4763" marR="4763" marT="4763" marB="0" anchor="b"/>
+                </a:tc>
+                <a:tc>
+                  <a:txBody>
+                    <a:bodyPr/>
+                    <a:lstStyle/>
+                    <a:p>
+                      <a:pPr algn="l" fontAlgn="b">
+                        <a:buNone/>
+                      </a:pPr>
+                      <a:r>
+                        <a:rPr lang="en-GB" sz="1100" u="none" strike="noStrike">
+                          <a:effectLst/>
+                        </a:rPr>
+                        <a:t>x</a:t>
+                      </a:r>
+                      <a:endParaRPr lang="en-GB" sz="1100" b="0" i="0" u="none" strike="noStrike">
+                        <a:solidFill>
+                          <a:srgbClr val="000000"/>
+                        </a:solidFill>
+                        <a:effectLst/>
+                        <a:latin typeface="Aptos Narrow" panose="020B0004020202020204" pitchFamily="34" charset="0"/>
+                      </a:endParaRPr>
+                    </a:p>
+                  </a:txBody>
+                  <a:tcPr marL="4763" marR="4763" marT="4763" marB="0" anchor="b"/>
+                </a:tc>
+                <a:tc>
+                  <a:txBody>
+                    <a:bodyPr/>
+                    <a:lstStyle/>
+                    <a:p>
+                      <a:pPr algn="l" fontAlgn="b">
+                        <a:buNone/>
+                      </a:pPr>
+                      <a:r>
+                        <a:rPr lang="en-GB" sz="1100" u="none" strike="noStrike">
+                          <a:effectLst/>
+                        </a:rPr>
+                        <a:t> </a:t>
+                      </a:r>
+                      <a:endParaRPr lang="en-GB" sz="1100" b="0" i="0" u="none" strike="noStrike">
+                        <a:solidFill>
+                          <a:srgbClr val="000000"/>
+                        </a:solidFill>
+                        <a:effectLst/>
+                        <a:latin typeface="Aptos Narrow" panose="020B0004020202020204" pitchFamily="34" charset="0"/>
+                      </a:endParaRPr>
+                    </a:p>
+                  </a:txBody>
+                  <a:tcPr marL="4763" marR="4763" marT="4763" marB="0" anchor="b"/>
+                </a:tc>
+                <a:tc>
+                  <a:txBody>
+                    <a:bodyPr/>
+                    <a:lstStyle/>
+                    <a:p>
+                      <a:pPr algn="l" fontAlgn="b">
+                        <a:buNone/>
+                      </a:pPr>
+                      <a:r>
+                        <a:rPr lang="en-GB" sz="1100" u="none" strike="noStrike">
+                          <a:effectLst/>
+                        </a:rPr>
+                        <a:t> </a:t>
+                      </a:r>
+                      <a:endParaRPr lang="en-GB" sz="1100" b="0" i="0" u="none" strike="noStrike">
+                        <a:solidFill>
+                          <a:srgbClr val="000000"/>
+                        </a:solidFill>
+                        <a:effectLst/>
+                        <a:latin typeface="Aptos Narrow" panose="020B0004020202020204" pitchFamily="34" charset="0"/>
+                      </a:endParaRPr>
+                    </a:p>
+                  </a:txBody>
+                  <a:tcPr marL="4763" marR="4763" marT="4763" marB="0" anchor="b"/>
+                </a:tc>
+                <a:tc>
+                  <a:txBody>
+                    <a:bodyPr/>
+                    <a:lstStyle/>
+                    <a:p>
+                      <a:pPr algn="l" fontAlgn="b">
+                        <a:buNone/>
+                      </a:pPr>
+                      <a:r>
+                        <a:rPr lang="en-GB" sz="1100" u="none" strike="noStrike">
+                          <a:effectLst/>
+                        </a:rPr>
+                        <a:t> </a:t>
+                      </a:r>
+                      <a:endParaRPr lang="en-GB" sz="1100" b="0" i="0" u="none" strike="noStrike">
+                        <a:solidFill>
+                          <a:srgbClr val="000000"/>
+                        </a:solidFill>
+                        <a:effectLst/>
+                        <a:latin typeface="Aptos Narrow" panose="020B0004020202020204" pitchFamily="34" charset="0"/>
+                      </a:endParaRPr>
+                    </a:p>
+                  </a:txBody>
+                  <a:tcPr marL="4763" marR="4763" marT="4763" marB="0" anchor="b"/>
+                </a:tc>
+                <a:extLst>
+                  <a:ext uri="{0D108BD9-81ED-4DB2-BD59-A6C34878D82A}">
+                    <a16:rowId xmlns:a16="http://schemas.microsoft.com/office/drawing/2014/main" val="524431166"/>
+                  </a:ext>
+                </a:extLst>
+              </a:tr>
+              <a:tr h="180975">
+                <a:tc>
+                  <a:txBody>
+                    <a:bodyPr/>
+                    <a:lstStyle/>
+                    <a:p>
+                      <a:pPr algn="r" fontAlgn="b">
+                        <a:buNone/>
+                      </a:pPr>
+                      <a:r>
+                        <a:rPr lang="en-GB" sz="1100" u="none" strike="noStrike">
+                          <a:effectLst/>
+                        </a:rPr>
+                        <a:t>Signed consent</a:t>
+                      </a:r>
+                      <a:endParaRPr lang="en-GB" sz="1100" b="0" i="0" u="none" strike="noStrike">
+                        <a:solidFill>
+                          <a:srgbClr val="000000"/>
+                        </a:solidFill>
+                        <a:effectLst/>
+                        <a:latin typeface="Aptos Narrow" panose="020B0004020202020204" pitchFamily="34" charset="0"/>
+                      </a:endParaRPr>
+                    </a:p>
+                  </a:txBody>
+                  <a:tcPr marL="4763" marR="4763" marT="4763" marB="0" anchor="b"/>
+                </a:tc>
+                <a:tc>
+                  <a:txBody>
+                    <a:bodyPr/>
+                    <a:lstStyle/>
+                    <a:p>
+                      <a:pPr algn="l" fontAlgn="b">
+                        <a:buNone/>
+                      </a:pPr>
+                      <a:r>
+                        <a:rPr lang="en-GB" sz="1100" u="none" strike="noStrike">
+                          <a:effectLst/>
+                        </a:rPr>
+                        <a:t> </a:t>
+                      </a:r>
+                      <a:endParaRPr lang="en-GB" sz="1100" b="0" i="0" u="none" strike="noStrike">
+                        <a:solidFill>
+                          <a:srgbClr val="000000"/>
+                        </a:solidFill>
+                        <a:effectLst/>
+                        <a:latin typeface="Aptos Narrow" panose="020B0004020202020204" pitchFamily="34" charset="0"/>
+                      </a:endParaRPr>
+                    </a:p>
+                  </a:txBody>
+                  <a:tcPr marL="4763" marR="4763" marT="4763" marB="0" anchor="b"/>
+                </a:tc>
+                <a:tc>
+                  <a:txBody>
+                    <a:bodyPr/>
+                    <a:lstStyle/>
+                    <a:p>
+                      <a:pPr algn="l" fontAlgn="b">
+                        <a:buNone/>
+                      </a:pPr>
+                      <a:r>
+                        <a:rPr lang="en-GB" sz="1100" u="none" strike="noStrike">
+                          <a:effectLst/>
+                        </a:rPr>
+                        <a:t>x</a:t>
+                      </a:r>
+                      <a:endParaRPr lang="en-GB" sz="1100" b="0" i="0" u="none" strike="noStrike">
+                        <a:solidFill>
+                          <a:srgbClr val="000000"/>
+                        </a:solidFill>
+                        <a:effectLst/>
+                        <a:latin typeface="Aptos Narrow" panose="020B0004020202020204" pitchFamily="34" charset="0"/>
+                      </a:endParaRPr>
+                    </a:p>
+                  </a:txBody>
+                  <a:tcPr marL="4763" marR="4763" marT="4763" marB="0" anchor="b"/>
+                </a:tc>
+                <a:tc>
+                  <a:txBody>
+                    <a:bodyPr/>
+                    <a:lstStyle/>
+                    <a:p>
+                      <a:pPr algn="l" fontAlgn="b">
+                        <a:buNone/>
+                      </a:pPr>
+                      <a:r>
+                        <a:rPr lang="en-GB" sz="1100" u="none" strike="noStrike">
+                          <a:effectLst/>
+                        </a:rPr>
+                        <a:t> </a:t>
+                      </a:r>
+                      <a:endParaRPr lang="en-GB" sz="1100" b="0" i="0" u="none" strike="noStrike">
+                        <a:solidFill>
+                          <a:srgbClr val="000000"/>
+                        </a:solidFill>
+                        <a:effectLst/>
+                        <a:latin typeface="Aptos Narrow" panose="020B0004020202020204" pitchFamily="34" charset="0"/>
+                      </a:endParaRPr>
+                    </a:p>
+                  </a:txBody>
+                  <a:tcPr marL="4763" marR="4763" marT="4763" marB="0" anchor="b"/>
+                </a:tc>
+                <a:tc>
+                  <a:txBody>
+                    <a:bodyPr/>
+                    <a:lstStyle/>
+                    <a:p>
+                      <a:pPr algn="l" fontAlgn="b">
+                        <a:buNone/>
+                      </a:pPr>
+                      <a:r>
+                        <a:rPr lang="en-GB" sz="1100" u="none" strike="noStrike">
+                          <a:effectLst/>
+                        </a:rPr>
+                        <a:t> </a:t>
+                      </a:r>
+                      <a:endParaRPr lang="en-GB" sz="1100" b="0" i="0" u="none" strike="noStrike">
+                        <a:solidFill>
+                          <a:srgbClr val="000000"/>
+                        </a:solidFill>
+                        <a:effectLst/>
+                        <a:latin typeface="Aptos Narrow" panose="020B0004020202020204" pitchFamily="34" charset="0"/>
+                      </a:endParaRPr>
+                    </a:p>
+                  </a:txBody>
+                  <a:tcPr marL="4763" marR="4763" marT="4763" marB="0" anchor="b"/>
+                </a:tc>
+                <a:tc>
+                  <a:txBody>
+                    <a:bodyPr/>
+                    <a:lstStyle/>
+                    <a:p>
+                      <a:pPr algn="l" fontAlgn="b">
+                        <a:buNone/>
+                      </a:pPr>
+                      <a:r>
+                        <a:rPr lang="en-GB" sz="1100" u="none" strike="noStrike">
+                          <a:effectLst/>
+                        </a:rPr>
+                        <a:t> </a:t>
+                      </a:r>
+                      <a:endParaRPr lang="en-GB" sz="1100" b="0" i="0" u="none" strike="noStrike">
+                        <a:solidFill>
+                          <a:srgbClr val="000000"/>
+                        </a:solidFill>
+                        <a:effectLst/>
+                        <a:latin typeface="Aptos Narrow" panose="020B0004020202020204" pitchFamily="34" charset="0"/>
+                      </a:endParaRPr>
+                    </a:p>
+                  </a:txBody>
+                  <a:tcPr marL="4763" marR="4763" marT="4763" marB="0" anchor="b"/>
+                </a:tc>
+                <a:extLst>
+                  <a:ext uri="{0D108BD9-81ED-4DB2-BD59-A6C34878D82A}">
+                    <a16:rowId xmlns:a16="http://schemas.microsoft.com/office/drawing/2014/main" val="66863262"/>
+                  </a:ext>
+                </a:extLst>
+              </a:tr>
+              <a:tr h="180975">
+                <a:tc>
+                  <a:txBody>
+                    <a:bodyPr/>
+                    <a:lstStyle/>
+                    <a:p>
+                      <a:pPr algn="r" fontAlgn="b">
+                        <a:buNone/>
+                      </a:pPr>
+                      <a:r>
+                        <a:rPr lang="en-GB" sz="1100" u="none" strike="noStrike">
+                          <a:effectLst/>
+                        </a:rPr>
+                        <a:t>Demographics</a:t>
+                      </a:r>
+                      <a:endParaRPr lang="en-GB" sz="1100" b="0" i="0" u="none" strike="noStrike">
+                        <a:solidFill>
+                          <a:srgbClr val="000000"/>
+                        </a:solidFill>
+                        <a:effectLst/>
+                        <a:latin typeface="Aptos Narrow" panose="020B0004020202020204" pitchFamily="34" charset="0"/>
+                      </a:endParaRPr>
+                    </a:p>
+                  </a:txBody>
+                  <a:tcPr marL="4763" marR="4763" marT="4763" marB="0" anchor="b"/>
+                </a:tc>
+                <a:tc>
+                  <a:txBody>
+                    <a:bodyPr/>
+                    <a:lstStyle/>
+                    <a:p>
+                      <a:pPr algn="l" fontAlgn="b">
+                        <a:buNone/>
+                      </a:pPr>
+                      <a:r>
+                        <a:rPr lang="en-GB" sz="1100" u="none" strike="noStrike">
+                          <a:effectLst/>
+                        </a:rPr>
+                        <a:t> </a:t>
+                      </a:r>
+                      <a:endParaRPr lang="en-GB" sz="1100" b="0" i="0" u="none" strike="noStrike">
+                        <a:solidFill>
+                          <a:srgbClr val="000000"/>
+                        </a:solidFill>
+                        <a:effectLst/>
+                        <a:latin typeface="Aptos Narrow" panose="020B0004020202020204" pitchFamily="34" charset="0"/>
+                      </a:endParaRPr>
+                    </a:p>
+                  </a:txBody>
+                  <a:tcPr marL="4763" marR="4763" marT="4763" marB="0" anchor="b"/>
+                </a:tc>
+                <a:tc>
+                  <a:txBody>
+                    <a:bodyPr/>
+                    <a:lstStyle/>
+                    <a:p>
+                      <a:pPr algn="l" fontAlgn="b">
+                        <a:buNone/>
+                      </a:pPr>
+                      <a:r>
+                        <a:rPr lang="en-GB" sz="1100" u="none" strike="noStrike">
+                          <a:effectLst/>
+                        </a:rPr>
+                        <a:t> </a:t>
+                      </a:r>
+                      <a:endParaRPr lang="en-GB" sz="1100" b="0" i="0" u="none" strike="noStrike">
+                        <a:solidFill>
+                          <a:srgbClr val="000000"/>
+                        </a:solidFill>
+                        <a:effectLst/>
+                        <a:latin typeface="Aptos Narrow" panose="020B0004020202020204" pitchFamily="34" charset="0"/>
+                      </a:endParaRPr>
+                    </a:p>
+                  </a:txBody>
+                  <a:tcPr marL="4763" marR="4763" marT="4763" marB="0" anchor="b"/>
+                </a:tc>
+                <a:tc>
+                  <a:txBody>
+                    <a:bodyPr/>
+                    <a:lstStyle/>
+                    <a:p>
+                      <a:pPr algn="l" fontAlgn="b">
+                        <a:buNone/>
+                      </a:pPr>
+                      <a:r>
+                        <a:rPr lang="en-GB" sz="1100" u="none" strike="noStrike">
+                          <a:effectLst/>
+                        </a:rPr>
+                        <a:t>x</a:t>
+                      </a:r>
+                      <a:endParaRPr lang="en-GB" sz="1100" b="0" i="0" u="none" strike="noStrike">
+                        <a:solidFill>
+                          <a:srgbClr val="000000"/>
+                        </a:solidFill>
+                        <a:effectLst/>
+                        <a:latin typeface="Aptos Narrow" panose="020B0004020202020204" pitchFamily="34" charset="0"/>
+                      </a:endParaRPr>
+                    </a:p>
+                  </a:txBody>
+                  <a:tcPr marL="4763" marR="4763" marT="4763" marB="0" anchor="b"/>
+                </a:tc>
+                <a:tc>
+                  <a:txBody>
+                    <a:bodyPr/>
+                    <a:lstStyle/>
+                    <a:p>
+                      <a:pPr algn="l" fontAlgn="b">
+                        <a:buNone/>
+                      </a:pPr>
+                      <a:r>
+                        <a:rPr lang="en-GB" sz="1100" u="none" strike="noStrike">
+                          <a:effectLst/>
+                        </a:rPr>
+                        <a:t> </a:t>
+                      </a:r>
+                      <a:endParaRPr lang="en-GB" sz="1100" b="0" i="0" u="none" strike="noStrike">
+                        <a:solidFill>
+                          <a:srgbClr val="000000"/>
+                        </a:solidFill>
+                        <a:effectLst/>
+                        <a:latin typeface="Aptos Narrow" panose="020B0004020202020204" pitchFamily="34" charset="0"/>
+                      </a:endParaRPr>
+                    </a:p>
+                  </a:txBody>
+                  <a:tcPr marL="4763" marR="4763" marT="4763" marB="0" anchor="b"/>
+                </a:tc>
+                <a:tc>
+                  <a:txBody>
+                    <a:bodyPr/>
+                    <a:lstStyle/>
+                    <a:p>
+                      <a:pPr algn="l" fontAlgn="b">
+                        <a:buNone/>
+                      </a:pPr>
+                      <a:r>
+                        <a:rPr lang="en-GB" sz="1100" u="none" strike="noStrike">
+                          <a:effectLst/>
+                        </a:rPr>
+                        <a:t> </a:t>
+                      </a:r>
+                      <a:endParaRPr lang="en-GB" sz="1100" b="0" i="0" u="none" strike="noStrike">
+                        <a:solidFill>
+                          <a:srgbClr val="000000"/>
+                        </a:solidFill>
+                        <a:effectLst/>
+                        <a:latin typeface="Aptos Narrow" panose="020B0004020202020204" pitchFamily="34" charset="0"/>
+                      </a:endParaRPr>
+                    </a:p>
+                  </a:txBody>
+                  <a:tcPr marL="4763" marR="4763" marT="4763" marB="0" anchor="b"/>
+                </a:tc>
+                <a:extLst>
+                  <a:ext uri="{0D108BD9-81ED-4DB2-BD59-A6C34878D82A}">
+                    <a16:rowId xmlns:a16="http://schemas.microsoft.com/office/drawing/2014/main" val="1998728259"/>
+                  </a:ext>
+                </a:extLst>
+              </a:tr>
+              <a:tr h="180975">
+                <a:tc>
+                  <a:txBody>
+                    <a:bodyPr/>
+                    <a:lstStyle/>
+                    <a:p>
+                      <a:pPr algn="r" fontAlgn="b">
+                        <a:buNone/>
+                      </a:pPr>
+                      <a:r>
+                        <a:rPr lang="en-GB" sz="1100" u="none" strike="noStrike">
+                          <a:effectLst/>
+                        </a:rPr>
+                        <a:t>Clinical Assessment</a:t>
+                      </a:r>
+                      <a:endParaRPr lang="en-GB" sz="1100" b="0" i="0" u="none" strike="noStrike">
+                        <a:solidFill>
+                          <a:srgbClr val="000000"/>
+                        </a:solidFill>
+                        <a:effectLst/>
+                        <a:latin typeface="Aptos Narrow" panose="020B0004020202020204" pitchFamily="34" charset="0"/>
+                      </a:endParaRPr>
+                    </a:p>
+                  </a:txBody>
+                  <a:tcPr marL="4763" marR="4763" marT="4763" marB="0" anchor="b"/>
+                </a:tc>
+                <a:tc>
+                  <a:txBody>
+                    <a:bodyPr/>
+                    <a:lstStyle/>
+                    <a:p>
+                      <a:pPr algn="l" fontAlgn="b">
+                        <a:buNone/>
+                      </a:pPr>
+                      <a:r>
+                        <a:rPr lang="en-GB" sz="1100" u="none" strike="noStrike">
+                          <a:effectLst/>
+                        </a:rPr>
+                        <a:t> </a:t>
+                      </a:r>
+                      <a:endParaRPr lang="en-GB" sz="1100" b="0" i="0" u="none" strike="noStrike">
+                        <a:solidFill>
+                          <a:srgbClr val="000000"/>
+                        </a:solidFill>
+                        <a:effectLst/>
+                        <a:latin typeface="Aptos Narrow" panose="020B0004020202020204" pitchFamily="34" charset="0"/>
+                      </a:endParaRPr>
+                    </a:p>
+                  </a:txBody>
+                  <a:tcPr marL="4763" marR="4763" marT="4763" marB="0" anchor="b"/>
+                </a:tc>
+                <a:tc>
+                  <a:txBody>
+                    <a:bodyPr/>
+                    <a:lstStyle/>
+                    <a:p>
+                      <a:pPr algn="l" fontAlgn="b">
+                        <a:buNone/>
+                      </a:pPr>
+                      <a:r>
+                        <a:rPr lang="en-GB" sz="1100" u="none" strike="noStrike">
+                          <a:effectLst/>
+                        </a:rPr>
+                        <a:t> </a:t>
+                      </a:r>
+                      <a:endParaRPr lang="en-GB" sz="1100" b="0" i="0" u="none" strike="noStrike">
+                        <a:solidFill>
+                          <a:srgbClr val="000000"/>
+                        </a:solidFill>
+                        <a:effectLst/>
+                        <a:latin typeface="Aptos Narrow" panose="020B0004020202020204" pitchFamily="34" charset="0"/>
+                      </a:endParaRPr>
+                    </a:p>
+                  </a:txBody>
+                  <a:tcPr marL="4763" marR="4763" marT="4763" marB="0" anchor="b"/>
+                </a:tc>
+                <a:tc>
+                  <a:txBody>
+                    <a:bodyPr/>
+                    <a:lstStyle/>
+                    <a:p>
+                      <a:pPr algn="l" fontAlgn="b">
+                        <a:buNone/>
+                      </a:pPr>
+                      <a:r>
+                        <a:rPr lang="en-GB" sz="1100" u="none" strike="noStrike">
+                          <a:effectLst/>
+                        </a:rPr>
+                        <a:t>x</a:t>
+                      </a:r>
+                      <a:endParaRPr lang="en-GB" sz="1100" b="0" i="0" u="none" strike="noStrike">
+                        <a:solidFill>
+                          <a:srgbClr val="000000"/>
+                        </a:solidFill>
+                        <a:effectLst/>
+                        <a:latin typeface="Aptos Narrow" panose="020B0004020202020204" pitchFamily="34" charset="0"/>
+                      </a:endParaRPr>
+                    </a:p>
+                  </a:txBody>
+                  <a:tcPr marL="4763" marR="4763" marT="4763" marB="0" anchor="b"/>
+                </a:tc>
+                <a:tc>
+                  <a:txBody>
+                    <a:bodyPr/>
+                    <a:lstStyle/>
+                    <a:p>
+                      <a:pPr algn="l" fontAlgn="b">
+                        <a:buNone/>
+                      </a:pPr>
+                      <a:r>
+                        <a:rPr lang="en-GB" sz="1100" u="none" strike="noStrike">
+                          <a:effectLst/>
+                        </a:rPr>
+                        <a:t>x</a:t>
+                      </a:r>
+                      <a:endParaRPr lang="en-GB" sz="1100" b="0" i="0" u="none" strike="noStrike">
+                        <a:solidFill>
+                          <a:srgbClr val="000000"/>
+                        </a:solidFill>
+                        <a:effectLst/>
+                        <a:latin typeface="Aptos Narrow" panose="020B0004020202020204" pitchFamily="34" charset="0"/>
+                      </a:endParaRPr>
+                    </a:p>
+                  </a:txBody>
+                  <a:tcPr marL="4763" marR="4763" marT="4763" marB="0" anchor="b"/>
+                </a:tc>
+                <a:tc>
+                  <a:txBody>
+                    <a:bodyPr/>
+                    <a:lstStyle/>
+                    <a:p>
+                      <a:pPr algn="l" fontAlgn="b">
+                        <a:buNone/>
+                      </a:pPr>
+                      <a:r>
+                        <a:rPr lang="en-GB" sz="1100" u="none" strike="noStrike">
+                          <a:effectLst/>
+                        </a:rPr>
+                        <a:t> </a:t>
+                      </a:r>
+                      <a:endParaRPr lang="en-GB" sz="1100" b="0" i="0" u="none" strike="noStrike">
+                        <a:solidFill>
+                          <a:srgbClr val="000000"/>
+                        </a:solidFill>
+                        <a:effectLst/>
+                        <a:latin typeface="Aptos Narrow" panose="020B0004020202020204" pitchFamily="34" charset="0"/>
+                      </a:endParaRPr>
+                    </a:p>
+                  </a:txBody>
+                  <a:tcPr marL="4763" marR="4763" marT="4763" marB="0" anchor="b"/>
+                </a:tc>
+                <a:extLst>
+                  <a:ext uri="{0D108BD9-81ED-4DB2-BD59-A6C34878D82A}">
+                    <a16:rowId xmlns:a16="http://schemas.microsoft.com/office/drawing/2014/main" val="1887653687"/>
+                  </a:ext>
+                </a:extLst>
+              </a:tr>
+              <a:tr h="180975">
+                <a:tc>
+                  <a:txBody>
+                    <a:bodyPr/>
+                    <a:lstStyle/>
+                    <a:p>
+                      <a:pPr algn="r" fontAlgn="b">
+                        <a:buNone/>
+                      </a:pPr>
+                      <a:r>
+                        <a:rPr lang="en-GB" sz="1100" u="none" strike="noStrike">
+                          <a:effectLst/>
+                        </a:rPr>
+                        <a:t>Dose</a:t>
+                      </a:r>
+                      <a:endParaRPr lang="en-GB" sz="1100" b="0" i="0" u="none" strike="noStrike">
+                        <a:solidFill>
+                          <a:srgbClr val="000000"/>
+                        </a:solidFill>
+                        <a:effectLst/>
+                        <a:latin typeface="Aptos Narrow" panose="020B0004020202020204" pitchFamily="34" charset="0"/>
+                      </a:endParaRPr>
+                    </a:p>
+                  </a:txBody>
+                  <a:tcPr marL="4763" marR="4763" marT="4763" marB="0" anchor="b"/>
+                </a:tc>
+                <a:tc>
+                  <a:txBody>
+                    <a:bodyPr/>
+                    <a:lstStyle/>
+                    <a:p>
+                      <a:pPr algn="l" fontAlgn="b">
+                        <a:buNone/>
+                      </a:pPr>
+                      <a:r>
+                        <a:rPr lang="en-GB" sz="1100" u="none" strike="noStrike">
+                          <a:effectLst/>
+                        </a:rPr>
+                        <a:t> </a:t>
+                      </a:r>
+                      <a:endParaRPr lang="en-GB" sz="1100" b="0" i="0" u="none" strike="noStrike">
+                        <a:solidFill>
+                          <a:srgbClr val="000000"/>
+                        </a:solidFill>
+                        <a:effectLst/>
+                        <a:latin typeface="Aptos Narrow" panose="020B0004020202020204" pitchFamily="34" charset="0"/>
+                      </a:endParaRPr>
+                    </a:p>
+                  </a:txBody>
+                  <a:tcPr marL="4763" marR="4763" marT="4763" marB="0" anchor="b"/>
+                </a:tc>
+                <a:tc>
+                  <a:txBody>
+                    <a:bodyPr/>
+                    <a:lstStyle/>
+                    <a:p>
+                      <a:pPr algn="l" fontAlgn="b">
+                        <a:buNone/>
+                      </a:pPr>
+                      <a:r>
+                        <a:rPr lang="en-GB" sz="1100" u="none" strike="noStrike">
+                          <a:effectLst/>
+                        </a:rPr>
+                        <a:t> </a:t>
+                      </a:r>
+                      <a:endParaRPr lang="en-GB" sz="1100" b="0" i="0" u="none" strike="noStrike">
+                        <a:solidFill>
+                          <a:srgbClr val="000000"/>
+                        </a:solidFill>
+                        <a:effectLst/>
+                        <a:latin typeface="Aptos Narrow" panose="020B0004020202020204" pitchFamily="34" charset="0"/>
+                      </a:endParaRPr>
+                    </a:p>
+                  </a:txBody>
+                  <a:tcPr marL="4763" marR="4763" marT="4763" marB="0" anchor="b"/>
+                </a:tc>
+                <a:tc>
+                  <a:txBody>
+                    <a:bodyPr/>
+                    <a:lstStyle/>
+                    <a:p>
+                      <a:pPr algn="l" fontAlgn="b">
+                        <a:buNone/>
+                      </a:pPr>
+                      <a:r>
+                        <a:rPr lang="en-GB" sz="1100" u="none" strike="noStrike">
+                          <a:effectLst/>
+                        </a:rPr>
+                        <a:t>x</a:t>
+                      </a:r>
+                      <a:endParaRPr lang="en-GB" sz="1100" b="0" i="0" u="none" strike="noStrike">
+                        <a:solidFill>
+                          <a:srgbClr val="000000"/>
+                        </a:solidFill>
+                        <a:effectLst/>
+                        <a:latin typeface="Aptos Narrow" panose="020B0004020202020204" pitchFamily="34" charset="0"/>
+                      </a:endParaRPr>
+                    </a:p>
+                  </a:txBody>
+                  <a:tcPr marL="4763" marR="4763" marT="4763" marB="0" anchor="b"/>
+                </a:tc>
+                <a:tc>
+                  <a:txBody>
+                    <a:bodyPr/>
+                    <a:lstStyle/>
+                    <a:p>
+                      <a:pPr algn="l" fontAlgn="b">
+                        <a:buNone/>
+                      </a:pPr>
+                      <a:r>
+                        <a:rPr lang="en-GB" sz="1100" u="none" strike="noStrike">
+                          <a:effectLst/>
+                        </a:rPr>
+                        <a:t>x</a:t>
+                      </a:r>
+                      <a:endParaRPr lang="en-GB" sz="1100" b="0" i="0" u="none" strike="noStrike">
+                        <a:solidFill>
+                          <a:srgbClr val="000000"/>
+                        </a:solidFill>
+                        <a:effectLst/>
+                        <a:latin typeface="Aptos Narrow" panose="020B0004020202020204" pitchFamily="34" charset="0"/>
+                      </a:endParaRPr>
+                    </a:p>
+                  </a:txBody>
+                  <a:tcPr marL="4763" marR="4763" marT="4763" marB="0" anchor="b"/>
+                </a:tc>
+                <a:tc>
+                  <a:txBody>
+                    <a:bodyPr/>
+                    <a:lstStyle/>
+                    <a:p>
+                      <a:pPr algn="l" fontAlgn="b">
+                        <a:buNone/>
+                      </a:pPr>
+                      <a:r>
+                        <a:rPr lang="en-GB" sz="1100" u="none" strike="noStrike">
+                          <a:effectLst/>
+                        </a:rPr>
+                        <a:t> </a:t>
+                      </a:r>
+                      <a:endParaRPr lang="en-GB" sz="1100" b="0" i="0" u="none" strike="noStrike">
+                        <a:solidFill>
+                          <a:srgbClr val="000000"/>
+                        </a:solidFill>
+                        <a:effectLst/>
+                        <a:latin typeface="Aptos Narrow" panose="020B0004020202020204" pitchFamily="34" charset="0"/>
+                      </a:endParaRPr>
+                    </a:p>
+                  </a:txBody>
+                  <a:tcPr marL="4763" marR="4763" marT="4763" marB="0" anchor="b"/>
+                </a:tc>
+                <a:extLst>
+                  <a:ext uri="{0D108BD9-81ED-4DB2-BD59-A6C34878D82A}">
+                    <a16:rowId xmlns:a16="http://schemas.microsoft.com/office/drawing/2014/main" val="4217741875"/>
+                  </a:ext>
+                </a:extLst>
+              </a:tr>
+              <a:tr h="180975">
+                <a:tc>
+                  <a:txBody>
+                    <a:bodyPr/>
+                    <a:lstStyle/>
+                    <a:p>
+                      <a:pPr algn="r" fontAlgn="b">
+                        <a:buNone/>
+                      </a:pPr>
+                      <a:r>
+                        <a:rPr lang="en-GB" sz="1100" u="none" strike="noStrike" dirty="0">
+                          <a:effectLst/>
+                        </a:rPr>
+                        <a:t>Discharge</a:t>
+                      </a:r>
+                      <a:endParaRPr lang="en-GB" sz="1100" b="0" i="0" u="none" strike="noStrike" dirty="0">
+                        <a:solidFill>
+                          <a:srgbClr val="000000"/>
+                        </a:solidFill>
+                        <a:effectLst/>
+                        <a:latin typeface="Aptos Narrow" panose="020B0004020202020204" pitchFamily="34" charset="0"/>
+                      </a:endParaRPr>
+                    </a:p>
+                  </a:txBody>
+                  <a:tcPr marL="4763" marR="4763" marT="4763" marB="0" anchor="b"/>
+                </a:tc>
+                <a:tc>
+                  <a:txBody>
+                    <a:bodyPr/>
+                    <a:lstStyle/>
+                    <a:p>
+                      <a:pPr algn="l" fontAlgn="b">
+                        <a:buNone/>
+                      </a:pPr>
+                      <a:r>
+                        <a:rPr lang="en-GB" sz="1100" u="none" strike="noStrike">
+                          <a:effectLst/>
+                        </a:rPr>
+                        <a:t> </a:t>
+                      </a:r>
+                      <a:endParaRPr lang="en-GB" sz="1100" b="0" i="0" u="none" strike="noStrike">
+                        <a:solidFill>
+                          <a:srgbClr val="000000"/>
+                        </a:solidFill>
+                        <a:effectLst/>
+                        <a:latin typeface="Aptos Narrow" panose="020B0004020202020204" pitchFamily="34" charset="0"/>
+                      </a:endParaRPr>
+                    </a:p>
+                  </a:txBody>
+                  <a:tcPr marL="4763" marR="4763" marT="4763" marB="0" anchor="b"/>
+                </a:tc>
+                <a:tc>
+                  <a:txBody>
+                    <a:bodyPr/>
+                    <a:lstStyle/>
+                    <a:p>
+                      <a:pPr algn="l" fontAlgn="b">
+                        <a:buNone/>
+                      </a:pPr>
+                      <a:r>
+                        <a:rPr lang="en-GB" sz="1100" u="none" strike="noStrike">
+                          <a:effectLst/>
+                        </a:rPr>
+                        <a:t> </a:t>
+                      </a:r>
+                      <a:endParaRPr lang="en-GB" sz="1100" b="0" i="0" u="none" strike="noStrike">
+                        <a:solidFill>
+                          <a:srgbClr val="000000"/>
+                        </a:solidFill>
+                        <a:effectLst/>
+                        <a:latin typeface="Aptos Narrow" panose="020B0004020202020204" pitchFamily="34" charset="0"/>
+                      </a:endParaRPr>
+                    </a:p>
+                  </a:txBody>
+                  <a:tcPr marL="4763" marR="4763" marT="4763" marB="0" anchor="b"/>
+                </a:tc>
+                <a:tc>
+                  <a:txBody>
+                    <a:bodyPr/>
+                    <a:lstStyle/>
+                    <a:p>
+                      <a:pPr algn="l" fontAlgn="b">
+                        <a:buNone/>
+                      </a:pPr>
+                      <a:r>
+                        <a:rPr lang="en-GB" sz="1100" u="none" strike="noStrike">
+                          <a:effectLst/>
+                        </a:rPr>
+                        <a:t> </a:t>
+                      </a:r>
+                      <a:endParaRPr lang="en-GB" sz="1100" b="0" i="0" u="none" strike="noStrike">
+                        <a:solidFill>
+                          <a:srgbClr val="000000"/>
+                        </a:solidFill>
+                        <a:effectLst/>
+                        <a:latin typeface="Aptos Narrow" panose="020B0004020202020204" pitchFamily="34" charset="0"/>
+                      </a:endParaRPr>
+                    </a:p>
+                  </a:txBody>
+                  <a:tcPr marL="4763" marR="4763" marT="4763" marB="0" anchor="b"/>
+                </a:tc>
+                <a:tc>
+                  <a:txBody>
+                    <a:bodyPr/>
+                    <a:lstStyle/>
+                    <a:p>
+                      <a:pPr algn="l" fontAlgn="b">
+                        <a:buNone/>
+                      </a:pPr>
+                      <a:r>
+                        <a:rPr lang="en-GB" sz="1100" u="none" strike="noStrike">
+                          <a:effectLst/>
+                        </a:rPr>
+                        <a:t> </a:t>
+                      </a:r>
+                      <a:endParaRPr lang="en-GB" sz="1100" b="0" i="0" u="none" strike="noStrike">
+                        <a:solidFill>
+                          <a:srgbClr val="000000"/>
+                        </a:solidFill>
+                        <a:effectLst/>
+                        <a:latin typeface="Aptos Narrow" panose="020B0004020202020204" pitchFamily="34" charset="0"/>
+                      </a:endParaRPr>
+                    </a:p>
+                  </a:txBody>
+                  <a:tcPr marL="4763" marR="4763" marT="4763" marB="0" anchor="b"/>
+                </a:tc>
+                <a:tc>
+                  <a:txBody>
+                    <a:bodyPr/>
+                    <a:lstStyle/>
+                    <a:p>
+                      <a:pPr algn="l" fontAlgn="b">
+                        <a:buNone/>
+                      </a:pPr>
+                      <a:r>
+                        <a:rPr lang="en-GB" sz="1100" u="none" strike="noStrike" dirty="0">
+                          <a:effectLst/>
+                        </a:rPr>
+                        <a:t>x</a:t>
+                      </a:r>
+                      <a:endParaRPr lang="en-GB" sz="1100" b="0" i="0" u="none" strike="noStrike" dirty="0">
+                        <a:solidFill>
+                          <a:srgbClr val="000000"/>
+                        </a:solidFill>
+                        <a:effectLst/>
+                        <a:latin typeface="Aptos Narrow" panose="020B0004020202020204" pitchFamily="34" charset="0"/>
+                      </a:endParaRPr>
+                    </a:p>
+                  </a:txBody>
+                  <a:tcPr marL="4763" marR="4763" marT="4763" marB="0" anchor="b"/>
+                </a:tc>
+                <a:extLst>
+                  <a:ext uri="{0D108BD9-81ED-4DB2-BD59-A6C34878D82A}">
+                    <a16:rowId xmlns:a16="http://schemas.microsoft.com/office/drawing/2014/main" val="3135586460"/>
+                  </a:ext>
+                </a:extLst>
+              </a:tr>
+            </a:tbl>
+          </a:graphicData>
+        </a:graphic>
+      </p:graphicFrame>
+      <p:sp>
+        <p:nvSpPr>
+          <p:cNvPr id="3" name="TextBox 2">
+            <a:extLst>
+              <a:ext uri="{FF2B5EF4-FFF2-40B4-BE49-F238E27FC236}">
+                <a16:creationId xmlns:a16="http://schemas.microsoft.com/office/drawing/2014/main" id="{B91C507A-27C9-8361-F621-6CDC6FF8A2AA}"/>
+              </a:ext>
+            </a:extLst>
+          </p:cNvPr>
+          <p:cNvSpPr txBox="1"/>
+          <p:nvPr/>
+        </p:nvSpPr>
+        <p:spPr>
+          <a:xfrm>
+            <a:off x="2698653" y="2039815"/>
+            <a:ext cx="3962400" cy="342314"/>
+          </a:xfrm>
+          <a:prstGeom prst="rect">
+            <a:avLst/>
+          </a:prstGeom>
+          <a:noFill/>
+        </p:spPr>
+        <p:txBody>
+          <a:bodyPr wrap="none" rtlCol="0">
+            <a:noAutofit/>
+          </a:bodyPr>
+          <a:lstStyle/>
+          <a:p>
+            <a:pPr algn="ctr"/>
+            <a:r>
+              <a:rPr lang="en-GB" b="1" dirty="0"/>
+              <a:t>Exemplar Schedule of Activities</a:t>
+            </a:r>
+          </a:p>
+        </p:txBody>
+      </p:sp>
+    </p:spTree>
+    <p:extLst>
+      <p:ext uri="{BB962C8B-B14F-4D97-AF65-F5344CB8AC3E}">
+        <p14:creationId xmlns:p14="http://schemas.microsoft.com/office/powerpoint/2010/main" val="941598130"/>
+      </p:ext>
+    </p:extLst>
+  </p:cSld>
+  <p:clrMapOvr>
+    <a:masterClrMapping/>
+  </p:clrMapOvr>
+  <p:transition>
+    <p:fade/>
+  </p:transition>
+</p:sld>
+</file>
+
 <file path=ppt/slides/slide2.xml><?xml version="1.0" encoding="utf-8"?>
 <p:sld xmlns:a="http://schemas.openxmlformats.org/drawingml/2006/main" xmlns:r="http://schemas.openxmlformats.org/officeDocument/2006/relationships" xmlns:p="http://schemas.openxmlformats.org/presentationml/2006/main">
   <p:cSld>
@@ -23835,10 +25682,10 @@
           <p:nvPr/>
         </p:nvPicPr>
         <p:blipFill>
-          <a:blip r:embed="rId2">
+          <a:blip>
             <a:extLst>
               <a:ext uri="{96DAC541-7B7A-43D3-8B79-37D633B846F1}">
-                <asvg:svgBlip xmlns:asvg="http://schemas.microsoft.com/office/drawing/2016/SVG/main" r:embed="rId3"/>
+                <asvg:svgBlip xmlns:asvg="http://schemas.microsoft.com/office/drawing/2016/SVG/main" r:embed="rId2"/>
               </a:ext>
             </a:extLst>
           </a:blip>
@@ -28002,6 +29849,26 @@
 </file>
 
 <file path=customXml/item1.xml><?xml version="1.0" encoding="utf-8"?>
+<p:properties xmlns:p="http://schemas.microsoft.com/office/2006/metadata/properties" xmlns:xsi="http://www.w3.org/2001/XMLSchema-instance" xmlns:pc="http://schemas.microsoft.com/office/infopath/2007/PartnerControls">
+  <documentManagement>
+    <lcf76f155ced4ddcb4097134ff3c332f xmlns="5b833577-d5f3-4c92-a991-e0f5e5f065ff">
+      <Terms xmlns="http://schemas.microsoft.com/office/infopath/2007/PartnerControls"/>
+    </lcf76f155ced4ddcb4097134ff3c332f>
+    <TaxCatchAll xmlns="f82658c3-1dde-4375-8027-c01e071e8904" xsi:nil="true"/>
+  </documentManagement>
+</p:properties>
+</file>
+
+<file path=customXml/item2.xml><?xml version="1.0" encoding="utf-8"?>
+<?mso-contentType ?>
+<FormTemplates xmlns="http://schemas.microsoft.com/sharepoint/v3/contenttype/forms">
+  <Display>DocumentLibraryForm</Display>
+  <Edit>DocumentLibraryForm</Edit>
+  <New>DocumentLibraryForm</New>
+</FormTemplates>
+</file>
+
+<file path=customXml/item3.xml><?xml version="1.0" encoding="utf-8"?>
 <ct:contentTypeSchema xmlns:ct="http://schemas.microsoft.com/office/2006/metadata/contentType" xmlns:ma="http://schemas.microsoft.com/office/2006/metadata/properties/metaAttributes" ct:_="" ma:_="" ma:contentTypeName="Document" ma:contentTypeID="0x010100C3FF88792079FE4CAD7BBDE0BC7B7482" ma:contentTypeVersion="16" ma:contentTypeDescription="Create a new document." ma:contentTypeScope="" ma:versionID="10b42e779589e082fc18e8126cc73c95">
   <xsd:schema xmlns:xsd="http://www.w3.org/2001/XMLSchema" xmlns:xs="http://www.w3.org/2001/XMLSchema" xmlns:p="http://schemas.microsoft.com/office/2006/metadata/properties" xmlns:ns2="5b833577-d5f3-4c92-a991-e0f5e5f065ff" xmlns:ns3="f82658c3-1dde-4375-8027-c01e071e8904" targetNamespace="http://schemas.microsoft.com/office/2006/metadata/properties" ma:root="true" ma:fieldsID="929128d0b677e760dca1e9118ba1563a" ns2:_="" ns3:_="">
     <xsd:import namespace="5b833577-d5f3-4c92-a991-e0f5e5f065ff"/>
@@ -28228,34 +30095,40 @@
 </ct:contentTypeSchema>
 </file>
 
-<file path=customXml/item2.xml><?xml version="1.0" encoding="utf-8"?>
-<?mso-contentType ?>
-<FormTemplates xmlns="http://schemas.microsoft.com/sharepoint/v3/contenttype/forms">
-  <Display>DocumentLibraryForm</Display>
-  <Edit>DocumentLibraryForm</Edit>
-  <New>DocumentLibraryForm</New>
-</FormTemplates>
-</file>
-
-<file path=customXml/item3.xml><?xml version="1.0" encoding="utf-8"?>
-<p:properties xmlns:p="http://schemas.microsoft.com/office/2006/metadata/properties" xmlns:xsi="http://www.w3.org/2001/XMLSchema-instance" xmlns:pc="http://schemas.microsoft.com/office/infopath/2007/PartnerControls">
-  <documentManagement>
-    <lcf76f155ced4ddcb4097134ff3c332f xmlns="5b833577-d5f3-4c92-a991-e0f5e5f065ff">
-      <Terms xmlns="http://schemas.microsoft.com/office/infopath/2007/PartnerControls"/>
-    </lcf76f155ced4ddcb4097134ff3c332f>
-    <TaxCatchAll xmlns="f82658c3-1dde-4375-8027-c01e071e8904" xsi:nil="true"/>
-  </documentManagement>
-</p:properties>
-</file>
-
 <file path=customXml/itemProps1.xml><?xml version="1.0" encoding="utf-8"?>
-<ds:datastoreItem xmlns:ds="http://schemas.openxmlformats.org/officeDocument/2006/customXml" ds:itemID="{4A9A45B4-740D-4C76-B87E-7179ACD7FD1B}"/>
+<ds:datastoreItem xmlns:ds="http://schemas.openxmlformats.org/officeDocument/2006/customXml" ds:itemID="{DB0B5C36-FCDB-4D3E-B25C-742EC429D3C3}">
+  <ds:schemaRefs>
+    <ds:schemaRef ds:uri="http://schemas.microsoft.com/office/2006/metadata/properties"/>
+    <ds:schemaRef ds:uri="http://schemas.microsoft.com/office/infopath/2007/PartnerControls"/>
+    <ds:schemaRef ds:uri="5b833577-d5f3-4c92-a991-e0f5e5f065ff"/>
+    <ds:schemaRef ds:uri="f82658c3-1dde-4375-8027-c01e071e8904"/>
+  </ds:schemaRefs>
+</ds:datastoreItem>
 </file>
 
 <file path=customXml/itemProps2.xml><?xml version="1.0" encoding="utf-8"?>
-<ds:datastoreItem xmlns:ds="http://schemas.openxmlformats.org/officeDocument/2006/customXml" ds:itemID="{39F12FE4-0B52-4758-B2F9-AF9CD73F46F7}"/>
+<ds:datastoreItem xmlns:ds="http://schemas.openxmlformats.org/officeDocument/2006/customXml" ds:itemID="{39F12FE4-0B52-4758-B2F9-AF9CD73F46F7}">
+  <ds:schemaRefs>
+    <ds:schemaRef ds:uri="http://schemas.microsoft.com/sharepoint/v3/contenttype/forms"/>
+  </ds:schemaRefs>
+</ds:datastoreItem>
 </file>
 
 <file path=customXml/itemProps3.xml><?xml version="1.0" encoding="utf-8"?>
-<ds:datastoreItem xmlns:ds="http://schemas.openxmlformats.org/officeDocument/2006/customXml" ds:itemID="{DB0B5C36-FCDB-4D3E-B25C-742EC429D3C3}"/>
+<ds:datastoreItem xmlns:ds="http://schemas.openxmlformats.org/officeDocument/2006/customXml" ds:itemID="{4A9A45B4-740D-4C76-B87E-7179ACD7FD1B}">
+  <ds:schemaRefs>
+    <ds:schemaRef ds:uri="http://schemas.microsoft.com/office/2006/metadata/contentType"/>
+    <ds:schemaRef ds:uri="http://schemas.microsoft.com/office/2006/metadata/properties/metaAttributes"/>
+    <ds:schemaRef ds:uri="http://www.w3.org/2001/XMLSchema"/>
+    <ds:schemaRef ds:uri="http://schemas.microsoft.com/office/2006/metadata/properties"/>
+    <ds:schemaRef ds:uri="5b833577-d5f3-4c92-a991-e0f5e5f065ff"/>
+    <ds:schemaRef ds:uri="f82658c3-1dde-4375-8027-c01e071e8904"/>
+    <ds:schemaRef ds:uri="http://schemas.microsoft.com/office/2006/documentManagement/types"/>
+    <ds:schemaRef ds:uri="http://schemas.microsoft.com/office/infopath/2007/PartnerControls"/>
+    <ds:schemaRef ds:uri="http://schemas.openxmlformats.org/package/2006/metadata/core-properties"/>
+    <ds:schemaRef ds:uri="http://purl.org/dc/elements/1.1/"/>
+    <ds:schemaRef ds:uri="http://purl.org/dc/terms/"/>
+    <ds:schemaRef ds:uri="http://schemas.microsoft.com/internal/obd"/>
+  </ds:schemaRefs>
+</ds:datastoreItem>
 </file>